--- a/参赛材料/知歇-路演/知歇-路演.pptx
+++ b/参赛材料/知歇-路演/知歇-路演.pptx
@@ -561,7 +561,7 @@
   <p:cSld>
     <p:spTree>
       <p:nvGrpSpPr>
-        <p:cNvPr id="1" name="" descr="&lt;Slide style={{ width: 1280, height: 720, background: '#0B1220', padding: '64px 80px', flexDirection: 'row', alignItems: 'center', justifyContent: 'space-between' }}&gt;&#10;    &lt;Box style={{ width: 620, flexDirection: 'column', gap: 20 }}&gt;&#10;        &lt;Box style={{ flexDirection: 'row', alignItems: 'center', gap: 14 }}&gt;&#10;            &lt;svg width={40} height={40} viewBox='0 0 40 40'&gt;&#10;                &lt;circle cx='20' cy='20' r='17' fill='none' stroke='#4FE0B0' strokeWidth='1' opacity='0.45' /&gt;&#10;                &lt;path d='M28 10 A17 17 0 1 0 28 30' fill='none' stroke='#4FE0B0' strokeWidth='2.5' /&gt;&#10;                &lt;rect x='15' y='15' width='2.4' height='10' rx='1.2' fill='#4FE0B0' /&gt;&#10;                &lt;rect x='20' y='15' width='2.4' height='10' rx='1.2' fill='#4FE0B0' /&gt;&#10;            &lt;/svg&gt;&#10;            &lt;Text style={{ fontSize: 15, color: '#E8EEF7', opacity: 0.5, letterSpacing: 6 }}&gt;Z H I X I E&lt;/Text&gt;&#10;        &lt;/Box&gt;&#10;        &lt;Text style={{ fontSize: 72, fontWeight: 'bold', color: '#E8EEF7', lineHeight: 1.15 }}&gt;知歇 &lt;span style={{ color: '#4FE0B0' }}&gt;ZhiXie&lt;/span&gt;&lt;/Text&gt;&#10;        &lt;Text style={{ fontSize: 26, color: '#4FE0B0', letterSpacing: 3 }}&gt;知时而歇，张弛有度&lt;/Text&gt;&#10;        &lt;Box style={{ height: 3, width: 120, background: 'linear-gradient(135deg, #4FE0B0 0%, #2E9E8F 100%)', borderRadius: 2 }} /&gt;&#10;        &lt;Text style={{ fontSize: 20, color: '#E8EEF7', opacity: 0.72, lineHeight: 1.6 }}&gt;一款融合智能体的桌面休息提醒工具。&lt;br /&gt;说一句话，智能体把它变成可执行的休息节律。&lt;/Text&gt;&#10;        &lt;Text style={{ fontSize: 16, color: '#E8EEF7', opacity: 0.5, marginTop: 10 }}&gt;无锡开放大学 · 指导教师 王敏 · 创新主赛道 AIGC 创新组&lt;/Text&gt;&#10;    &lt;/Box&gt;&#10;    &lt;Box style={{ width: 440, height: 440, justifyContent: 'center', alignItems: 'center' }}&gt;&#10;        &lt;svg width={440} height={440} viewBox='0 0 440 440'&gt;&#10;            &lt;circle cx='220' cy='220' r='200' fill='rgba(79,224,176,0.04)' /&gt;&#10;            &lt;circle cx='220' cy='220' r='200' fill='none' stroke='#4FE0B0' strokeWidth='1' opacity='0.16' /&gt;&#10;            &lt;circle cx='220' cy='220' r='146' fill='none' stroke='#4FE0B0' strokeWidth='1' opacity='0.26' /&gt;&#10;            &lt;circle cx='220' cy='220' r='92' fill='none' stroke='#4FE0B0' strokeWidth='1.5' opacity='0.45' /&gt;&#10;            &lt;circle cx='220' cy='220' r='5' fill='#4FE0B0' /&gt;&#10;            &lt;path d='M220 220 L392 112' fill='none' stroke='#4FE0B0' strokeWidth='2' opacity='0.65' /&gt;&#10;            &lt;path d='M220 220 L392 112' fill='none' stroke='#4FE0B0' strokeWidth='2' opacity='0.65' /&gt;&#10;            &lt;path d='M330 128 A200 200 0 0 1 392 214' fill='none' stroke='#4FE0B0' strokeWidth='2.5' opacity='0.8' /&gt;&#10;            &lt;circle cx='392' cy='112' r='4' fill='#4FE0B0' /&gt;&#10;        &lt;/svg&gt;&#10;    &lt;/Box&gt;&#10;&lt;/Slide&gt;&#10;"/>
+        <p:cNvPr id="1" name=""/>
         <p:cNvGrpSpPr/>
         <p:nvPr/>
       </p:nvGrpSpPr>
@@ -594,7 +594,10 @@
         </p:spPr>
         <p:txBody>
           <a:bodyPr/>
-          <a:p/>
+          <a:p>
+            <a:pPr/>
+            <a:endParaRPr/>
+          </a:p>
         </p:txBody>
       </p:sp>
       <p:pic>
@@ -749,7 +752,10 @@
         </p:spPr>
         <p:txBody>
           <a:bodyPr/>
-          <a:p/>
+          <a:p>
+            <a:pPr/>
+            <a:endParaRPr/>
+          </a:p>
         </p:txBody>
       </p:sp>
       <p:pic>
@@ -908,105 +914,17 @@
                 <a:latin typeface="Microsoft YaHei"/>
                 <a:ea typeface="Microsoft YaHei"/>
               </a:rPr>
-              <a:t>无锡开放大学</a:t>
-            </a:r>
-            <a:r>
-              <a:rPr lang="en-US" sz="1200">
-                <a:solidFill>
-                  <a:srgbClr val="E8EEF7">
-                    <a:alpha val="50000"/>
-                  </a:srgbClr>
-                </a:solidFill>
-                <a:latin typeface="Microsoft YaHei"/>
-                <a:ea typeface="Microsoft YaHei"/>
-              </a:rPr>
-              <a:t xml:space="preserve"> · </a:t>
-            </a:r>
-            <a:r>
-              <a:rPr lang="zh-CN" sz="1200">
-                <a:solidFill>
-                  <a:srgbClr val="E8EEF7">
-                    <a:alpha val="50000"/>
-                  </a:srgbClr>
-                </a:solidFill>
-                <a:latin typeface="Microsoft YaHei"/>
-                <a:ea typeface="Microsoft YaHei"/>
-              </a:rPr>
-              <a:t>指导教师</a:t>
-            </a:r>
-            <a:r>
-              <a:rPr lang="en-US" sz="1200">
-                <a:solidFill>
-                  <a:srgbClr val="E8EEF7">
-                    <a:alpha val="50000"/>
-                  </a:srgbClr>
-                </a:solidFill>
-                <a:latin typeface="Microsoft YaHei"/>
-                <a:ea typeface="Microsoft YaHei"/>
-              </a:rPr>
-              <a:t xml:space="preserve"> </a:t>
-            </a:r>
-            <a:r>
-              <a:rPr lang="zh-CN" sz="1200">
-                <a:solidFill>
-                  <a:srgbClr val="E8EEF7">
-                    <a:alpha val="50000"/>
-                  </a:srgbClr>
-                </a:solidFill>
-                <a:latin typeface="Microsoft YaHei"/>
-                <a:ea typeface="Microsoft YaHei"/>
-              </a:rPr>
-              <a:t>王敏</a:t>
-            </a:r>
-            <a:r>
-              <a:rPr lang="en-US" sz="1200">
-                <a:solidFill>
-                  <a:srgbClr val="E8EEF7">
-                    <a:alpha val="50000"/>
-                  </a:srgbClr>
-                </a:solidFill>
-                <a:latin typeface="Microsoft YaHei"/>
-                <a:ea typeface="Microsoft YaHei"/>
-              </a:rPr>
-              <a:t xml:space="preserve"> · </a:t>
-            </a:r>
-            <a:r>
-              <a:rPr lang="zh-CN" sz="1200">
-                <a:solidFill>
-                  <a:srgbClr val="E8EEF7">
-                    <a:alpha val="50000"/>
-                  </a:srgbClr>
-                </a:solidFill>
-                <a:latin typeface="Microsoft YaHei"/>
-                <a:ea typeface="Microsoft YaHei"/>
-              </a:rPr>
-              <a:t>创新主赛道</a:t>
-            </a:r>
-            <a:r>
-              <a:rPr lang="en-US" sz="1200">
-                <a:solidFill>
-                  <a:srgbClr val="E8EEF7">
-                    <a:alpha val="50000"/>
-                  </a:srgbClr>
-                </a:solidFill>
-                <a:latin typeface="Microsoft YaHei"/>
-                <a:ea typeface="Microsoft YaHei"/>
-              </a:rPr>
-              <a:t xml:space="preserve"> AIGC </a:t>
-            </a:r>
-            <a:r>
-              <a:rPr lang="zh-CN" sz="1200">
-                <a:solidFill>
-                  <a:srgbClr val="E8EEF7">
-                    <a:alpha val="50000"/>
-                  </a:srgbClr>
-                </a:solidFill>
-                <a:latin typeface="Microsoft YaHei"/>
-                <a:ea typeface="Microsoft YaHei"/>
-              </a:rPr>
-              <a:t>创新组</a:t>
-            </a:r>
-            <a:endParaRPr/>
+              <a:t>创新主赛道 · AIGC 创新组</a:t>
+            </a:r>
+            <a:endParaRPr lang="zh-CN" sz="1200">
+              <a:solidFill>
+                <a:srgbClr val="E8EEF7">
+                  <a:alpha val="50000"/>
+                </a:srgbClr>
+              </a:solidFill>
+              <a:latin typeface="Microsoft YaHei"/>
+              <a:ea typeface="Microsoft YaHei"/>
+            </a:endParaRPr>
           </a:p>
         </p:txBody>
       </p:sp>
@@ -1020,7 +938,7 @@
   <p:cSld>
     <p:spTree>
       <p:nvGrpSpPr>
-        <p:cNvPr id="11" name="" descr="&lt;Slide style={{ width: 1280, height: 720, background: '#0B1220', padding: '20px 64px' }}&gt;&#10;    &lt;Box style={{ height: 100, flexDirection: 'row', alignItems: 'flex-end', justifyContent: 'space-between', paddingBottom: 18 }}&gt;&#10;        &lt;Box style={{ flexDirection: 'column', gap: 6 }}&gt;&#10;            &lt;Text style={{ fontSize: 36, fontWeight: 'bold', color: '#E8EEF7' }}&gt;全程不写一行代码&lt;/Text&gt;&#10;            &lt;Text style={{ fontSize: 16, color: '#E8EEF7', opacity: 0.55, letterSpacing: 1 }}&gt;低代码 / 无代码：两档用户，同一套能力&lt;/Text&gt;&#10;        &lt;/Box&gt;&#10;        &lt;Text style={{ fontSize: 14, fontFamily: 'Consolas', color: '#E8EEF7', opacity: 0.35 }}&gt;10&lt;/Text&gt;&#10;    &lt;/Box&gt;&#10;    &lt;Box style={{ height: 500, flexDirection: 'column', gap: 18 }}&gt;&#10;        &lt;Box style={{ height: 208, flexDirection: 'row', gap: 28, padding: 22, background: 'rgba(232,238,247,0.04)', border: '1px solid rgba(232,238,247,0.10)', borderRadius: 12 }}&gt;&#10;            &lt;Box style={{ width: 250, flexDirection: 'column', gap: 8 }}&gt;&#10;                &lt;Text style={{ fontSize: 14, fontFamily: 'Consolas', color: '#4FE0B0', letterSpacing: 2 }}&gt;普通用户&lt;/Text&gt;&#10;                &lt;Text style={{ fontSize: 22, fontWeight: 'bold', color: '#E8EEF7', lineHeight: 1.4 }}&gt;装完即用&lt;br /&gt;零配置、零联网&lt;/Text&gt;&#10;                &lt;Text style={{ fontSize: 15, color: '#E8EEF7', opacity: 0.6, lineHeight: 1.5, marginTop: 'auto' }}&gt;不需要账号，不需要密钥，不产生任何费用。&lt;/Text&gt;&#10;            &lt;/Box&gt;&#10;            &lt;svg width={520} height={164} viewBox='0 0 520 164'&gt;&#10;                &lt;rect x='6' y='26' width='140' height='112' rx='10' fill='rgba(232,238,247,0.05)' stroke='rgba(232,238,247,0.16)' /&gt;&#10;                &lt;rect x='190' y='26' width='140' height='112' rx='10' fill='rgba(232,238,247,0.05)' stroke='rgba(232,238,247,0.16)' /&gt;&#10;                &lt;rect x='374' y='26' width='140' height='112' rx='10' fill='rgba(79,224,176,0.12)' stroke='#4FE0B0' /&gt;&#10;                &lt;path d='M150 82 L182 82' fill='none' stroke='#4FE0B0' strokeWidth='2' opacity='0.8' /&gt;&#10;                &lt;path d='M176 76 L186 82 L176 88 Z' fill='#4FE0B0' /&gt;&#10;                &lt;path d='M334 82 L366 82' fill='none' stroke='#4FE0B0' strokeWidth='2' opacity='0.8' /&gt;&#10;                &lt;path d='M360 76 L370 82 L360 88 Z' fill='#4FE0B0' /&gt;&#10;                &lt;circle cx='76' cy='62' r='16' fill='none' stroke='#4FE0B0' strokeWidth='1.5' opacity='0.7' /&gt;&#10;                &lt;path d='M76 54 L76 66 M70 60 L82 60' fill='none' stroke='#4FE0B0' strokeWidth='2' opacity='0.7' /&gt;&#10;                &lt;circle cx='260' cy='62' r='16' fill='none' stroke='#4FE0B0' strokeWidth='1.5' opacity='0.7' /&gt;&#10;                &lt;path d='M253 62 L258 68 L268 56' fill='none' stroke='#4FE0B0' strokeWidth='2' opacity='0.7' /&gt;&#10;                &lt;circle cx='444' cy='62' r='16' fill='#4FE0B0' /&gt;&#10;                &lt;path d='M437 62 L442 68 L452 56' fill='none' stroke='#0B1220' strokeWidth='2.5' /&gt;&#10;                &lt;rect x='46' y='94' width='60' height='10' rx='5' fill='rgba(232,238,247,0.35)' /&gt;&#10;                &lt;rect x='230' y='94' width='60' height='10' rx='5' fill='rgba(232,238,247,0.35)' /&gt;&#10;                &lt;rect x='414' y='94' width='60' height='10' rx='5' fill='rgba(11,18,32,0.4)' /&gt;&#10;                &lt;rect x='56' y='114' width='40' height='8' rx='4' fill='rgba(232,238,247,0.18)' /&gt;&#10;                &lt;rect x='240' y='114' width='40' height='8' rx='4' fill='rgba(232,238,247,0.18)' /&gt;&#10;                &lt;rect x='424' y='114' width='40' height='8' rx='4' fill='rgba(11,18,32,0.25)' /&gt;&#10;            &lt;/svg&gt;&#10;            &lt;Box style={{ flex: 1, flexDirection: 'column', gap: 10, justifyContent: 'center' }}&gt;&#10;                &lt;Text style={{ fontSize: 17, color: '#E8EEF7', opacity: 0.85 }}&gt;① 安装应用　→　② 打开即用　→　③ 智能体已在工作&lt;/Text&gt;&#10;                &lt;Text style={{ fontSize: 15, color: '#E8EEF7', opacity: 0.6, lineHeight: 1.6 }}&gt;默认即以本机规则引擎模式运行，用户不需要知道&quot;模型&quot;&quot;接口&quot;&quot;密钥&quot;这些词。&lt;/Text&gt;&#10;            &lt;/Box&gt;&#10;        &lt;/Box&gt;&#10;        &lt;Box style={{ height: 208, flexDirection: 'row', gap: 28, padding: 22, background: 'rgba(232,238,247,0.04)', border: '1px solid rgba(232,238,247,0.10)', borderRadius: 12 }}&gt;&#10;            &lt;Box style={{ width: 250, flexDirection: 'column', gap: 8 }}&gt;&#10;                &lt;Text style={{ fontSize: 14, fontFamily: 'Consolas', color: '#4FE0B0', letterSpacing: 2 }}&gt;进阶用户（可选）&lt;/Text&gt;&#10;                &lt;Text style={{ fontSize: 22, fontWeight: 'bold', color: '#E8EEF7', lineHeight: 1.4 }}&gt;三格表单&lt;br /&gt;完成接入&lt;/Text&gt;&#10;                &lt;Text style={{ fontSize: 15, color: '#E8EEF7', opacity: 0.6, lineHeight: 1.5, marginTop: 'auto' }}&gt;兼容任意 OpenAI 格式接口，不限于默认服务商。&lt;/Text&gt;&#10;            &lt;/Box&gt;&#10;            &lt;Box style={{ flex: 1, flexDirection: 'row', gap: 16, alignItems: 'center' }}&gt;&#10;                &lt;Box style={{ flex: 1, height: 110, flexDirection: 'column', gap: 8, padding: '14px 16px', background: 'rgba(232,238,247,0.05)', border: '1px solid rgba(232,238,247,0.16)', borderRadius: 10 }}&gt;&#10;                    &lt;Text style={{ fontSize: 14, color: '#E8EEF7', opacity: 0.55 }}&gt;接口地址&lt;/Text&gt;&#10;                    &lt;Text style={{ fontSize: 14, fontFamily: 'Consolas', color: '#4FE0B0' }}&gt;https://api.deepseek.com/…&lt;/Text&gt;&#10;                    &lt;Box style={{ marginTop: 'auto', height: 8, flexDirection: 'row', gap: 6 }}&gt;&#10;                        &lt;Box style={{ width: 60, height: 8, background: 'rgba(79,224,176,0.5)', borderRadius: 4 }} /&gt;&#10;                        &lt;Box style={{ flex: 1, height: 8, background: 'rgba(232,238,247,0.12)', borderRadius: 4 }} /&gt;&#10;                    &lt;/Box&gt;&#10;                &lt;/Box&gt;&#10;                &lt;Box style={{ flex: 1, height: 110, flexDirection: 'column', gap: 8, padding: '14px 16px', background: 'rgba(232,238,247,0.05)', border: '1px solid rgba(232,238,247,0.16)', borderRadius: 10 }}&gt;&#10;                    &lt;Text style={{ fontSize: 14, color: '#E8EEF7', opacity: 0.55 }}&gt;模型名称&lt;/Text&gt;&#10;                    &lt;Text style={{ fontSize: 14, fontFamily: 'Consolas', color: '#4FE0B0' }}&gt;deepseek-chat&lt;/Text&gt;&#10;                    &lt;Box style={{ marginTop: 'auto', height: 8, flexDirection: 'row', gap: 6 }}&gt;&#10;                        &lt;Box style={{ width: 90, height: 8, background: 'rgba(79,224,176,0.5)', borderRadius: 4 }} /&gt;&#10;                        &lt;Box style={{ flex: 1, height: 8, background: 'rgba(232,238,247,0.12)', borderRadius: 4 }} /&gt;&#10;                    &lt;/Box&gt;&#10;                &lt;/Box&gt;&#10;                &lt;Box style={{ flex: 1, height: 110, flexDirection: 'column', gap: 8, padding: '14px 16px', background: 'rgba(232,238,247,0.05)', border: '1px solid rgba(232,238,247,0.16)', borderRadius: 10 }}&gt;&#10;                    &lt;Text style={{ fontSize: 14, color: '#E8EEF7', opacity: 0.55 }}&gt;API 密钥&lt;/Text&gt;&#10;                    &lt;Text style={{ fontSize: 14, fontFamily: 'Consolas', color: '#4FE0B0' }}&gt;•••••••••••••••&lt;/Text&gt;&#10;                    &lt;Box style={{ marginTop: 'auto', height: 8, flexDirection: 'row', gap: 6 }}&gt;&#10;                        &lt;Box style={{ width: 120, height: 8, background: 'rgba(79,224,176,0.5)', borderRadius: 4 }} /&gt;&#10;                        &lt;Box style={{ flex: 1, height: 8, background: 'rgba(232,238,247,0.12)', borderRadius: 4 }} /&gt;&#10;                    &lt;/Box&gt;&#10;                &lt;/Box&gt;&#10;            &lt;/Box&gt;&#10;        &lt;/Box&gt;&#10;        &lt;Box style={{ padding: '14px 20px', background: 'rgba(79,224,176,0.10)', borderRadius: 10 }}&gt;&#10;            &lt;Text style={{ fontSize: 16, color: '#E8EEF7', opacity: 0.9 }}&gt;低代码体现在三处：&lt;span style={{ color: '#4FE0B0' }}&gt;可视化配置&lt;/span&gt;（三格表单完成接入）·&lt;span style={{ color: '#4FE0B0' }}&gt;可视化确认&lt;/span&gt;（解析结果确认后才写入）·&lt;span style={{ color: '#4FE0B0' }}&gt;可视化调校&lt;/span&gt;（弹窗样式实时预览）。&lt;/Text&gt;&#10;        &lt;/Box&gt;&#10;    &lt;/Box&gt;&#10;    &lt;Box style={{ height: 60, flexDirection: 'row', alignItems: 'center', justifyContent: 'space-between' }}&gt;&#10;        &lt;Text style={{ fontSize: 14, color: '#E8EEF7', opacity: 0.42 }}&gt;知歇 ZhiXie · V1.0.0&lt;/Text&gt;&#10;        &lt;Text style={{ fontSize: 14, fontFamily: 'Consolas', color: '#E8EEF7', opacity: 0.42 }}&gt;10 / 18&lt;/Text&gt;&#10;    &lt;/Box&gt;&#10;&lt;/Slide&gt;&#10;"/>
+        <p:cNvPr id="11" name=""/>
         <p:cNvGrpSpPr/>
         <p:nvPr/>
       </p:nvGrpSpPr>
@@ -1053,7 +971,10 @@
         </p:spPr>
         <p:txBody>
           <a:bodyPr/>
-          <a:p/>
+          <a:p>
+            <a:pPr/>
+            <a:endParaRPr/>
+          </a:p>
         </p:txBody>
       </p:sp>
       <p:sp>
@@ -1123,7 +1044,10 @@
         </p:spPr>
         <p:txBody>
           <a:bodyPr/>
-          <a:p/>
+          <a:p>
+            <a:pPr/>
+            <a:endParaRPr/>
+          </a:p>
         </p:txBody>
       </p:sp>
       <p:sp>
@@ -1277,7 +1201,10 @@
         </p:spPr>
         <p:txBody>
           <a:bodyPr/>
-          <a:p/>
+          <a:p>
+            <a:pPr/>
+            <a:endParaRPr/>
+          </a:p>
         </p:txBody>
       </p:sp>
       <p:sp>
@@ -1400,7 +1327,10 @@
         </p:spPr>
         <p:txBody>
           <a:bodyPr/>
-          <a:p/>
+          <a:p>
+            <a:pPr/>
+            <a:endParaRPr/>
+          </a:p>
         </p:txBody>
       </p:sp>
       <p:sp>
@@ -1463,7 +1393,10 @@
         </p:spPr>
         <p:txBody>
           <a:bodyPr/>
-          <a:p/>
+          <a:p>
+            <a:pPr/>
+            <a:endParaRPr/>
+          </a:p>
         </p:txBody>
       </p:sp>
       <p:sp>
@@ -1491,7 +1424,10 @@
         </p:spPr>
         <p:txBody>
           <a:bodyPr/>
-          <a:p/>
+          <a:p>
+            <a:pPr/>
+            <a:endParaRPr/>
+          </a:p>
         </p:txBody>
       </p:sp>
       <p:sp>
@@ -1526,7 +1462,10 @@
         </p:spPr>
         <p:txBody>
           <a:bodyPr/>
-          <a:p/>
+          <a:p>
+            <a:pPr/>
+            <a:endParaRPr/>
+          </a:p>
         </p:txBody>
       </p:sp>
       <p:sp>
@@ -1589,7 +1528,10 @@
         </p:spPr>
         <p:txBody>
           <a:bodyPr/>
-          <a:p/>
+          <a:p>
+            <a:pPr/>
+            <a:endParaRPr/>
+          </a:p>
         </p:txBody>
       </p:sp>
       <p:sp>
@@ -1617,7 +1559,10 @@
         </p:spPr>
         <p:txBody>
           <a:bodyPr/>
-          <a:p/>
+          <a:p>
+            <a:pPr/>
+            <a:endParaRPr/>
+          </a:p>
         </p:txBody>
       </p:sp>
       <p:sp>
@@ -1652,7 +1597,10 @@
         </p:spPr>
         <p:txBody>
           <a:bodyPr/>
-          <a:p/>
+          <a:p>
+            <a:pPr/>
+            <a:endParaRPr/>
+          </a:p>
         </p:txBody>
       </p:sp>
       <p:sp>
@@ -1715,7 +1663,10 @@
         </p:spPr>
         <p:txBody>
           <a:bodyPr/>
-          <a:p/>
+          <a:p>
+            <a:pPr/>
+            <a:endParaRPr/>
+          </a:p>
         </p:txBody>
       </p:sp>
       <p:sp>
@@ -1743,7 +1694,10 @@
         </p:spPr>
         <p:txBody>
           <a:bodyPr/>
-          <a:p/>
+          <a:p>
+            <a:pPr/>
+            <a:endParaRPr/>
+          </a:p>
         </p:txBody>
       </p:sp>
       <p:sp>
@@ -1771,7 +1725,10 @@
         </p:spPr>
         <p:txBody>
           <a:bodyPr/>
-          <a:p/>
+          <a:p>
+            <a:pPr/>
+            <a:endParaRPr/>
+          </a:p>
         </p:txBody>
       </p:sp>
       <p:sp>
@@ -2536,7 +2493,7 @@
   <p:cSld>
     <p:spTree>
       <p:nvGrpSpPr>
-        <p:cNvPr id="46" name="" descr="&lt;Slide style={{ width: 1280, height: 720, background: '#0B1220', padding: '20px 64px' }}&gt;&#10;    &lt;Box style={{ height: 600, flexDirection: 'row', alignItems: 'center', gap: 64 }}&gt;&#10;        &lt;Text style={{ fontSize: 230, fontWeight: 'bold', fontFamily: 'Consolas', color: '#4FE0B0', opacity: 0.15, lineHeight: 1 }}&gt;03&lt;/Text&gt;&#10;        &lt;Box style={{ flexDirection: 'column', gap: 20, width: 540 }}&gt;&#10;            &lt;Text style={{ fontSize: 60, fontWeight: 'bold', color: '#E8EEF7', lineHeight: 1.15 }}&gt;工程质量与应用价值&lt;/Text&gt;&#10;            &lt;Box style={{ height: 4, width: 110, background: 'linear-gradient(135deg, #4FE0B0 0%, #2E9E8F 100%)', borderRadius: 2 }} /&gt;&#10;            &lt;Text style={{ fontSize: 20, color: '#E8EEF7', opacity: 0.72, lineHeight: 1.65 }}&gt;用可核验的数字回答一个问题：这不是一个只有演示效果的作品。&lt;br /&gt;最后落到适用场景、创新点与横向对比。&lt;/Text&gt;&#10;            &lt;Text style={{ fontSize: 15, fontFamily: 'Consolas', color: '#4FE0B0', letterSpacing: 2 }}&gt;P11 – P17&lt;/Text&gt;&#10;        &lt;/Box&gt;&#10;    &lt;/Box&gt;&#10;    &lt;Box style={{ height: 60, flexDirection: 'row', alignItems: 'center', justifyContent: 'space-between' }}&gt;&#10;        &lt;Text style={{ fontSize: 14, color: '#E8EEF7', opacity: 0.42 }}&gt;知歇 ZhiXie · V1.0.0&lt;/Text&gt;&#10;        &lt;Text style={{ fontSize: 14, fontFamily: 'Consolas', color: '#E8EEF7', opacity: 0.42 }}&gt;11 / 18&lt;/Text&gt;&#10;    &lt;/Box&gt;&#10;&lt;/Slide&gt;&#10;"/>
+        <p:cNvPr id="46" name=""/>
         <p:cNvGrpSpPr/>
         <p:nvPr/>
       </p:nvGrpSpPr>
@@ -2569,7 +2526,10 @@
         </p:spPr>
         <p:txBody>
           <a:bodyPr/>
-          <a:p/>
+          <a:p>
+            <a:pPr/>
+            <a:endParaRPr/>
+          </a:p>
         </p:txBody>
       </p:sp>
       <p:sp>
@@ -2638,7 +2598,10 @@
         </p:spPr>
         <p:txBody>
           <a:bodyPr/>
-          <a:p/>
+          <a:p>
+            <a:pPr/>
+            <a:endParaRPr/>
+          </a:p>
         </p:txBody>
       </p:sp>
       <p:sp>
@@ -2868,7 +2831,7 @@
   <p:cSld>
     <p:spTree>
       <p:nvGrpSpPr>
-        <p:cNvPr id="55" name="" descr="&lt;Slide style={{ width: 1280, height: 720, background: '#0B1220', padding: '20px 64px' }}&gt;&#10;    &lt;Box style={{ height: 100, flexDirection: 'row', alignItems: 'flex-end', justifyContent: 'space-between', paddingBottom: 18 }}&gt;&#10;        &lt;Box style={{ flexDirection: 'column', gap: 6 }}&gt;&#10;            &lt;Text style={{ fontSize: 36, fontWeight: 'bold', color: '#E8EEF7' }}&gt;可靠性由测试保证&lt;/Text&gt;&#10;            &lt;Text style={{ fontSize: 16, color: '#E8EEF7', opacity: 0.55, letterSpacing: 1 }}&gt;不靠演示运气，靠可重复的结果&lt;/Text&gt;&#10;        &lt;/Box&gt;&#10;        &lt;Text style={{ fontSize: 14, fontFamily: 'Consolas', color: '#4FE0B0', opacity: 0.8 }}&gt;质量证据&lt;/Text&gt;&#10;    &lt;/Box&gt;&#10;    &lt;Box style={{ height: 500, flexDirection: 'row', gap: 56 }}&gt;&#10;        &lt;Box style={{ width: 470, flexDirection: 'column', justifyContent: 'center', gap: 4 }}&gt;&#10;            &lt;Text style={{ fontSize: 150, fontWeight: 'bold', fontFamily: 'Consolas', color: '#4FE0B0', lineHeight: 1 }}&gt;138&lt;/Text&gt;&#10;            &lt;Text style={{ fontSize: 26, color: '#E8EEF7', marginTop: 14 }}&gt;项自动化测试&lt;/Text&gt;&#10;            &lt;Text style={{ fontSize: 17, color: '#E8EEF7', opacity: 0.6, marginTop: 6 }}&gt;全部通过 · 0 失败&lt;/Text&gt;&#10;            &lt;Box style={{ height: 3, width: 96, background: 'linear-gradient(135deg, #4FE0B0 0%, #2E9E8F 100%)', borderRadius: 2, marginTop: 20 }} /&gt;&#10;            &lt;Text style={{ fontSize: 16, color: '#E8EEF7', opacity: 0.62, lineHeight: 1.6, marginTop: 20 }}&gt;这个数字意味着：每次改动后全量重跑，新功能不会悄悄破坏既有行为——演示时看到的每个结果都是可复现的。&lt;/Text&gt;&#10;        &lt;/Box&gt;&#10;        &lt;Box style={{ flex: 1, flexDirection: 'column', gap: 14, justifyContent: 'center' }}&gt;&#10;            &lt;Box style={{ height: 66, flexDirection: 'row', alignItems: 'center', justifyContent: 'space-between', padding: '0 22px', background: 'rgba(232,238,247,0.05)', borderRadius: 10 }}&gt;&#10;                &lt;Text style={{ fontSize: 18, color: '#E8EEF7' }}&gt;前端单元测试&lt;/Text&gt;&#10;                &lt;Text style={{ fontSize: 22, fontWeight: 'bold', fontFamily: 'Consolas', color: '#4FE0B0' }}&gt;77 项&lt;/Text&gt;&#10;            &lt;/Box&gt;&#10;            &lt;Box style={{ height: 66, flexDirection: 'row', alignItems: 'center', justifyContent: 'space-between', padding: '0 22px', background: 'rgba(232,238,247,0.05)', borderRadius: 10 }}&gt;&#10;                &lt;Text style={{ fontSize: 18, color: '#E8EEF7' }}&gt;Rust 单元测试&lt;/Text&gt;&#10;                &lt;Text style={{ fontSize: 22, fontWeight: 'bold', fontFamily: 'Consolas', color: '#4FE0B0' }}&gt;61 项&lt;/Text&gt;&#10;            &lt;/Box&gt;&#10;            &lt;Box style={{ height: 66, flexDirection: 'row', alignItems: 'center', justifyContent: 'space-between', padding: '0 22px', background: 'rgba(232,238,247,0.05)', borderRadius: 10 }}&gt;&#10;                &lt;Text style={{ fontSize: 18, color: '#E8EEF7' }}&gt;通过率&lt;/Text&gt;&#10;                &lt;Text style={{ fontSize: 22, fontWeight: 'bold', fontFamily: 'Consolas', color: '#4FE0B0' }}&gt;100%&lt;/Text&gt;&#10;            &lt;/Box&gt;&#10;            &lt;Box style={{ flexDirection: 'row', gap: 14, marginTop: 6 }}&gt;&#10;                &lt;Box style={{ flex: 1, padding: '14px 12px', background: 'rgba(79,224,176,0.10)', borderRadius: 10, alignItems: 'center' }}&gt;&#10;                    &lt;Text style={{ fontSize: 15, color: '#E8EEF7', opacity: 0.88, textAlign: 'center' }}&gt;双平台构建通过&lt;/Text&gt;&#10;                &lt;/Box&gt;&#10;                &lt;Box style={{ flex: 1, padding: '14px 12px', background: 'rgba(79,224,176,0.10)', borderRadius: 10, alignItems: 'center' }}&gt;&#10;                    &lt;Text style={{ fontSize: 15, color: '#E8EEF7', opacity: 0.88, textAlign: 'center' }}&gt;类型全量检查&lt;/Text&gt;&#10;                &lt;/Box&gt;&#10;                &lt;Box style={{ flex: 1, padding: '14px 12px', background: 'rgba(79,224,176,0.10)', borderRadius: 10, alignItems: 'center' }}&gt;&#10;                    &lt;Text style={{ fontSize: 15, color: '#E8EEF7', opacity: 0.88, textAlign: 'center' }}&gt;数据原子写入&lt;/Text&gt;&#10;                &lt;/Box&gt;&#10;            &lt;/Box&gt;&#10;        &lt;/Box&gt;&#10;    &lt;/Box&gt;&#10;    &lt;Box style={{ height: 60, flexDirection: 'row', alignItems: 'center', justifyContent: 'space-between' }}&gt;&#10;        &lt;Text style={{ fontSize: 14, color: '#E8EEF7', opacity: 0.42 }}&gt;知歇 ZhiXie · V1.0.0&lt;/Text&gt;&#10;        &lt;Text style={{ fontSize: 14, fontFamily: 'Consolas', color: '#E8EEF7', opacity: 0.42 }}&gt;12 / 18&lt;/Text&gt;&#10;    &lt;/Box&gt;&#10;&lt;/Slide&gt;&#10;"/>
+        <p:cNvPr id="55" name=""/>
         <p:cNvGrpSpPr/>
         <p:nvPr/>
       </p:nvGrpSpPr>
@@ -2901,7 +2864,10 @@
         </p:spPr>
         <p:txBody>
           <a:bodyPr/>
-          <a:p/>
+          <a:p>
+            <a:pPr/>
+            <a:endParaRPr/>
+          </a:p>
         </p:txBody>
       </p:sp>
       <p:sp>
@@ -3040,7 +3006,10 @@
         </p:spPr>
         <p:txBody>
           <a:bodyPr/>
-          <a:p/>
+          <a:p>
+            <a:pPr/>
+            <a:endParaRPr/>
+          </a:p>
         </p:txBody>
       </p:sp>
       <p:sp>
@@ -3068,7 +3037,10 @@
         </p:spPr>
         <p:txBody>
           <a:bodyPr/>
-          <a:p/>
+          <a:p>
+            <a:pPr/>
+            <a:endParaRPr/>
+          </a:p>
         </p:txBody>
       </p:sp>
       <p:sp>
@@ -3176,7 +3148,10 @@
         </p:spPr>
         <p:txBody>
           <a:bodyPr/>
-          <a:p/>
+          <a:p>
+            <a:pPr/>
+            <a:endParaRPr/>
+          </a:p>
         </p:txBody>
       </p:sp>
       <p:sp>
@@ -3294,7 +3269,10 @@
         </p:spPr>
         <p:txBody>
           <a:bodyPr/>
-          <a:p/>
+          <a:p>
+            <a:pPr/>
+            <a:endParaRPr/>
+          </a:p>
         </p:txBody>
       </p:sp>
       <p:sp>
@@ -3392,7 +3370,10 @@
         </p:spPr>
         <p:txBody>
           <a:bodyPr/>
-          <a:p/>
+          <a:p>
+            <a:pPr/>
+            <a:endParaRPr/>
+          </a:p>
         </p:txBody>
       </p:sp>
       <p:sp>
@@ -3420,7 +3401,10 @@
         </p:spPr>
         <p:txBody>
           <a:bodyPr/>
-          <a:p/>
+          <a:p>
+            <a:pPr/>
+            <a:endParaRPr/>
+          </a:p>
         </p:txBody>
       </p:sp>
       <p:sp>
@@ -3448,7 +3432,10 @@
         </p:spPr>
         <p:txBody>
           <a:bodyPr/>
-          <a:p/>
+          <a:p>
+            <a:pPr/>
+            <a:endParaRPr/>
+          </a:p>
         </p:txBody>
       </p:sp>
       <p:sp>
@@ -3832,7 +3819,7 @@
   <p:cSld>
     <p:spTree>
       <p:nvGrpSpPr>
-        <p:cNvPr id="82" name="" descr="&lt;Slide style={{ width: 1280, height: 720, background: '#0B1220', padding: '20px 64px' }}&gt;&#10;    &lt;Box style={{ height: 100, flexDirection: 'row', alignItems: 'flex-end', justifyContent: 'space-between', paddingBottom: 18 }}&gt;&#10;        &lt;Box style={{ flexDirection: 'column', gap: 6 }}&gt;&#10;            &lt;Text style={{ fontSize: 36, fontWeight: 'bold', color: '#E8EEF7' }}&gt;测什么：容易出错的地方&lt;/Text&gt;&#10;            &lt;Text style={{ fontSize: 16, color: '#E8EEF7', opacity: 0.55, letterSpacing: 1 }}&gt;测试集中在时序与状态——功能演示时看不出来、但真实使用中一定会踩的坑&lt;/Text&gt;&#10;        &lt;/Box&gt;&#10;        &lt;Text style={{ fontSize: 14, fontFamily: 'Consolas', color: '#E8EEF7', opacity: 0.35 }}&gt;13&lt;/Text&gt;&#10;    &lt;/Box&gt;&#10;    &lt;Box style={{ height: 500, flexDirection: 'column', gap: 20 }}&gt;&#10;        &lt;Box style={{ height: 280, flexDirection: 'column', gap: 14 }}&gt;&#10;            &lt;Box style={{ height: 84, flexDirection: 'row', alignItems: 'center', gap: 20, padding: '0 22px', background: 'rgba(232,238,247,0.04)', border: '1px solid rgba(232,238,247,0.10)', borderRadius: 10 }}&gt;&#10;                &lt;Box style={{ width: 250, flexDirection: 'column', gap: 2 }}&gt;&#10;                    &lt;Text style={{ fontSize: 18, color: '#E8EEF7' }}&gt;触发 A&lt;/Text&gt;&#10;                    &lt;Text style={{ fontSize: 14, fontFamily: 'Consolas', color: '#E8EEF7', opacity: 0.5 }}&gt;00:00 到点 · 先发生&lt;/Text&gt;&#10;                &lt;/Box&gt;&#10;                &lt;svg width={120} height={40} viewBox='0 0 120 40'&gt;&#10;                    &lt;path d='M0 20 L104 20' fill='none' stroke='#E8EEF7' strokeWidth='2' strokeDasharray='6 6' opacity='0.35' /&gt;&#10;                    &lt;path d='M98 14 L108 20 L98 26 Z' fill='#E8EEF7' opacity='0.35' /&gt;&#10;                &lt;/svg&gt;&#10;                &lt;Box style={{ flex: 1, flexDirection: 'row', alignItems: 'center', gap: 12 }}&gt;&#10;                    &lt;svg width={26} height={26} viewBox='0 0 26 26'&gt;&#10;                        &lt;circle cx='13' cy='13' r='12' fill='none' stroke='#E8EEF7' strokeWidth='1.5' opacity='0.4' /&gt;&#10;                        &lt;path d='M8 8 L18 18 M18 8 L8 18' fill='none' stroke='#E8EEF7' strokeWidth='2' opacity='0.45' /&gt;&#10;                    &lt;/svg&gt;&#10;                    &lt;Text style={{ fontSize: 16, color: '#E8EEF7', opacity: 0.6 }}&gt;延迟到达 · 不能覆盖后到的触发&lt;/Text&gt;&#10;                &lt;/Box&gt;&#10;            &lt;/Box&gt;&#10;            &lt;Box style={{ height: 84, flexDirection: 'row', alignItems: 'center', gap: 20, padding: '0 22px', background: 'rgba(79,224,176,0.10)', border: '1px solid #4FE0B0', borderRadius: 10 }}&gt;&#10;                &lt;Box style={{ width: 250, flexDirection: 'column', gap: 2 }}&gt;&#10;                    &lt;Text style={{ fontSize: 18, color: '#E8EEF7' }}&gt;触发 B&lt;/Text&gt;&#10;                    &lt;Text style={{ fontSize: 14, fontFamily: 'Consolas', color: '#4FE0B0' }}&gt;00:01 到点 · 后发生&lt;/Text&gt;&#10;                &lt;/Box&gt;&#10;                &lt;svg width={120} height={40} viewBox='0 0 120 40'&gt;&#10;                    &lt;path d='M0 20 L104 20' fill='none' stroke='#4FE0B0' strokeWidth='2' /&gt;&#10;                    &lt;path d='M98 14 L108 20 L98 26 Z' fill='#4FE0B0' /&gt;&#10;                &lt;/svg&gt;&#10;                &lt;Box style={{ flex: 1, flexDirection: 'row', alignItems: 'center', gap: 12 }}&gt;&#10;                    &lt;svg width={26} height={26} viewBox='0 0 26 26'&gt;&#10;                        &lt;circle cx='13' cy='13' r='12' fill='#4FE0B0' /&gt;&#10;                        &lt;path d='M7 13 L11 18 L19 8' fill='none' stroke='#0B1220' strokeWidth='2.5' /&gt;&#10;                    &lt;/svg&gt;&#10;                    &lt;Text style={{ fontSize: 16, color: '#E8EEF7', opacity: 0.9 }}&gt;成为当前弹窗 · 旧状态被正确丢弃&lt;/Text&gt;&#10;                &lt;/Box&gt;&#10;            &lt;/Box&gt;&#10;            &lt;Text style={{ fontSize: 15, color: '#E8EEF7', opacity: 0.55, lineHeight: 1.5 }}&gt;这类竞态在手动测试里极难复现，只能靠针对性的单元测试守住。同批测试还覆盖：按 Escape 关闭不会重复隐藏前端状态、关机失败时弹窗保留并提供重试。&lt;/Text&gt;&#10;        &lt;/Box&gt;&#10;        &lt;Box style={{ flex: 1, flexDirection: 'row', gap: 20 }}&gt;&#10;            &lt;Box style={{ flex: 1, flexDirection: 'column', gap: 10, padding: 20, background: 'rgba(232,238,247,0.04)', border: '1px solid rgba(232,238,247,0.10)', borderRadius: 12 }}&gt;&#10;                &lt;Text style={{ fontSize: 20, fontWeight: 'bold', color: '#4FE0B0' }}&gt;时序&lt;/Text&gt;&#10;                &lt;Text style={{ fontSize: 15, color: '#E8EEF7', opacity: 0.7, lineHeight: 1.6 }}&gt;延迟旧触发不覆盖新触发；弹窗状态机幂等；暂停与恢复不丢轮次。&lt;/Text&gt;&#10;            &lt;/Box&gt;&#10;            &lt;Box style={{ flex: 1, flexDirection: 'column', gap: 10, padding: 20, background: 'rgba(232,238,247,0.04)', border: '1px solid rgba(232,238,247,0.10)', borderRadius: 12 }}&gt;&#10;                &lt;Text style={{ fontSize: 20, fontWeight: 'bold', color: '#4FE0B0' }}&gt;数据&lt;/Text&gt;&#10;                &lt;Text style={{ fontSize: 15, color: '#E8EEF7', opacity: 0.7, lineHeight: 1.6 }}&gt;原子写入中途失败不损坏原文件；导入文件校验；旧版本配置先备份再重建。&lt;/Text&gt;&#10;            &lt;/Box&gt;&#10;            &lt;Box style={{ flex: 1, flexDirection: 'column', gap: 10, padding: 20, background: 'rgba(232,238,247,0.04)', border: '1px solid rgba(232,238,247,0.10)', borderRadius: 12 }}&gt;&#10;                &lt;Text style={{ fontSize: 20, fontWeight: 'bold', color: '#4FE0B0' }}&gt;智能体&lt;/Text&gt;&#10;                &lt;Text style={{ fontSize: 15, color: '#E8EEF7', opacity: 0.7, lineHeight: 1.6 }}&gt;中文时间与周几解析；系统操作识别；云端结果校验；JSON 提取容错。&lt;/Text&gt;&#10;            &lt;/Box&gt;&#10;        &lt;/Box&gt;&#10;    &lt;/Box&gt;&#10;    &lt;Box style={{ height: 60, flexDirection: 'row', alignItems: 'center', justifyContent: 'space-between' }}&gt;&#10;        &lt;Text style={{ fontSize: 14, color: '#E8EEF7', opacity: 0.42 }}&gt;知歇 ZhiXie · V1.0.0&lt;/Text&gt;&#10;        &lt;Text style={{ fontSize: 14, fontFamily: 'Consolas', color: '#E8EEF7', opacity: 0.42 }}&gt;13 / 18&lt;/Text&gt;&#10;    &lt;/Box&gt;&#10;&lt;/Slide&gt;&#10;"/>
+        <p:cNvPr id="82" name=""/>
         <p:cNvGrpSpPr/>
         <p:nvPr/>
       </p:nvGrpSpPr>
@@ -3865,7 +3852,10 @@
         </p:spPr>
         <p:txBody>
           <a:bodyPr/>
-          <a:p/>
+          <a:p>
+            <a:pPr/>
+            <a:endParaRPr/>
+          </a:p>
         </p:txBody>
       </p:sp>
       <p:sp>
@@ -3935,7 +3925,10 @@
         </p:spPr>
         <p:txBody>
           <a:bodyPr/>
-          <a:p/>
+          <a:p>
+            <a:pPr/>
+            <a:endParaRPr/>
+          </a:p>
         </p:txBody>
       </p:sp>
       <p:sp>
@@ -4075,7 +4068,10 @@
         </p:spPr>
         <p:txBody>
           <a:bodyPr/>
-          <a:p/>
+          <a:p>
+            <a:pPr/>
+            <a:endParaRPr/>
+          </a:p>
         </p:txBody>
       </p:sp>
       <p:sp>
@@ -4282,7 +4278,10 @@
         </p:spPr>
         <p:txBody>
           <a:bodyPr/>
-          <a:p/>
+          <a:p>
+            <a:pPr/>
+            <a:endParaRPr/>
+          </a:p>
         </p:txBody>
       </p:sp>
       <p:sp>
@@ -4352,7 +4351,10 @@
         </p:spPr>
         <p:txBody>
           <a:bodyPr/>
-          <a:p/>
+          <a:p>
+            <a:pPr/>
+            <a:endParaRPr/>
+          </a:p>
         </p:txBody>
       </p:sp>
       <p:sp>
@@ -4422,7 +4424,10 @@
         </p:spPr>
         <p:txBody>
           <a:bodyPr/>
-          <a:p/>
+          <a:p>
+            <a:pPr/>
+            <a:endParaRPr/>
+          </a:p>
         </p:txBody>
       </p:sp>
       <p:sp>
@@ -5027,7 +5032,7 @@
   <p:cSld>
     <p:spTree>
       <p:nvGrpSpPr>
-        <p:cNvPr id="111" name="" descr="&lt;Slide style={{ width: 1280, height: 720, background: '#0B1220', padding: '20px 64px' }}&gt;&#10;    &lt;Box style={{ height: 100, flexDirection: 'row', alignItems: 'flex-end', justifyContent: 'space-between', paddingBottom: 18 }}&gt;&#10;        &lt;Box style={{ flexDirection: 'column', gap: 6 }}&gt;&#10;            &lt;Text style={{ fontSize: 36, fontWeight: 'bold', color: '#E8EEF7' }}&gt;数据不出本机&lt;/Text&gt;&#10;            &lt;Text style={{ fontSize: 16, color: '#E8EEF7', opacity: 0.55, letterSpacing: 1 }}&gt;隐私不是功能开关，而是默认状态&lt;/Text&gt;&#10;        &lt;/Box&gt;&#10;        &lt;Text style={{ fontSize: 14, fontFamily: 'Consolas', color: '#E8EEF7', opacity: 0.35 }}&gt;14&lt;/Text&gt;&#10;    &lt;/Box&gt;&#10;    &lt;Box style={{ height: 500, flexDirection: 'row', gap: 32 }}&gt;&#10;        &lt;Box style={{ width: 372, flexDirection: 'column', justifyContent: 'space-between', padding: 24, background: 'rgba(79,224,176,0.08)', border: '1px solid rgba(79,224,176,0.35)', borderRadius: 14 }}&gt;&#10;            &lt;Box style={{ flexDirection: 'column', gap: 22 }}&gt;&#10;                &lt;Text style={{ fontSize: 34, fontWeight: 'bold', color: '#E8EEF7', lineHeight: 1.3 }}&gt;三个零&lt;/Text&gt;&#10;                &lt;Box style={{ flexDirection: 'column', gap: 16 }}&gt;&#10;                    &lt;Box style={{ flexDirection: 'row', gap: 12, alignItems: 'center' }}&gt;&#10;                        &lt;Text style={{ fontSize: 26, fontWeight: 'bold', fontFamily: 'Consolas', color: '#4FE0B0' }}&gt;零&lt;/Text&gt;&#10;                        &lt;Text style={{ fontSize: 19, color: '#E8EEF7' }}&gt;账号 · 无需注册登录&lt;/Text&gt;&#10;                    &lt;/Box&gt;&#10;                    &lt;Box style={{ flexDirection: 'row', gap: 12, alignItems: 'center' }}&gt;&#10;                        &lt;Text style={{ fontSize: 26, fontWeight: 'bold', fontFamily: 'Consolas', color: '#4FE0B0' }}&gt;零&lt;/Text&gt;&#10;                        &lt;Text style={{ fontSize: 19, color: '#E8EEF7' }}&gt;遥测 · 无埋点无广告&lt;/Text&gt;&#10;                    &lt;/Box&gt;&#10;                    &lt;Box style={{ flexDirection: 'row', gap: 12, alignItems: 'center' }}&gt;&#10;                        &lt;Text style={{ fontSize: 26, fontWeight: 'bold', fontFamily: 'Consolas', color: '#4FE0B0' }}&gt;零&lt;/Text&gt;&#10;                        &lt;Text style={{ fontSize: 19, color: '#E8EEF7' }}&gt;联网 · 默认完全离线&lt;/Text&gt;&#10;                    &lt;/Box&gt;&#10;                &lt;/Box&gt;&#10;            &lt;/Box&gt;&#10;            &lt;Text style={{ fontSize: 15, color: '#E8EEF7', opacity: 0.6, lineHeight: 1.6 }}&gt;提醒数据、弹窗底图、智能体配置全部保存在本机应用配置目录。&lt;/Text&gt;&#10;        &lt;/Box&gt;&#10;        &lt;Box style={{ flex: 1, flexDirection: 'column', gap: 18 }}&gt;&#10;            &lt;Box style={{ height: 268, justifyContent: 'center', alignItems: 'center', background: 'rgba(232,238,247,0.03)', border: '1px solid rgba(232,238,247,0.10)', borderRadius: 12 }}&gt;&#10;                &lt;svg width={700} height={230} viewBox='0 0 700 230'&gt;&#10;                    &lt;rect x='20' y='60' width='180' height='110' rx='10' fill='rgba(232,238,247,0.05)' stroke='rgba(232,238,247,0.18)' /&gt;&#10;                    &lt;rect x='250' y='60' width='180' height='110' rx='10' fill='rgba(232,238,247,0.05)' stroke='rgba(232,238,247,0.18)' /&gt;&#10;                    &lt;rect x='480' y='60' width='200' height='110' rx='10' fill='rgba(79,224,176,0.12)' stroke='#4FE0B0' /&gt;&#10;                    &lt;path d='M200 115 L242 115' fill='none' stroke='#4FE0B0' strokeWidth='2' opacity='0.8' /&gt;&#10;                    &lt;path d='M236 109 L246 115 L236 121 Z' fill='#4FE0B0' /&gt;&#10;                    &lt;path d='M430 115 L472 115' fill='none' stroke='#4FE0B0' strokeWidth='2' opacity='0.8' /&gt;&#10;                    &lt;path d='M466 109 L476 115 L466 121 Z' fill='#4FE0B0' /&gt;&#10;                    &lt;circle cx='110' cy='92' r='14' fill='none' stroke='#4FE0B0' strokeWidth='1.5' opacity='0.75' /&gt;&#10;                    &lt;path d='M102 92 L108 99 L119 86' fill='none' stroke='#4FE0B0' strokeWidth='2' opacity='0.75' /&gt;&#10;                    &lt;circle cx='340' cy='92' r='14' fill='none' stroke='#4FE0B0' strokeWidth='1.5' opacity='0.75' /&gt;&#10;                    &lt;rect x='331' y='86' width='18' height='13' rx='3' fill='none' stroke='#4FE0B0' strokeWidth='1.5' opacity='0.75' /&gt;&#10;                    &lt;path d='M336 86 L336 82 A4 4 0 0 1 344 82 L344 86' fill='none' stroke='#4FE0B0' strokeWidth='1.5' opacity='0.75' /&gt;&#10;                    &lt;rect x='498' y='86' width='60' height='12' rx='6' fill='#4FE0B0' opacity='0.9' /&gt;&#10;                    &lt;rect x='498' y='108' width='110' height='10' rx='5' fill='rgba(11,18,32,0.35)' /&gt;&#10;                    &lt;rect x='498' y='126' width='88' height='10' rx='5' fill='rgba(11,18,32,0.25)' /&gt;&#10;                    &lt;rect x='40' y='140' width='140' height='10' rx='5' fill='rgba(232,238,247,0.22)' /&gt;&#10;                    &lt;rect x='270' y='140' width='140' height='10' rx='5' fill='rgba(232,238,247,0.22)' /&gt;&#10;                    &lt;path d='M350 60 L350 20 L560 20' fill='none' stroke='#E8EEF7' strokeWidth='2' strokeDasharray='6 6' opacity='0.35' /&gt;&#10;                    &lt;path d='M554 14 L564 20 L554 26 Z' fill='#E8EEF7' opacity='0.35' /&gt;&#10;                    &lt;circle cx='620' cy='20' r='12' fill='none' stroke='#E8EEF7' strokeWidth='1.5' opacity='0.4' /&gt;&#10;                    &lt;path d='M615 15 L625 25 M625 15 L615 25' fill='none' stroke='#E8EEF7' strokeWidth='2' opacity='0.45' /&gt;&#10;                &lt;/svg&gt;&#10;                &lt;Box style={{ flexDirection: 'row', gap: 30, marginTop: 8 }}&gt;&#10;                    &lt;Text style={{ fontSize: 14, color: '#E8EEF7', opacity: 0.6 }}&gt;用户输入的那一句话&lt;/Text&gt;&#10;                    &lt;Text style={{ fontSize: 14, color: '#E8EEF7', opacity: 0.6 }}&gt;本机数据文件&lt;/Text&gt;&#10;                    &lt;Text style={{ fontSize: 14, color: '#4FE0B0' }}&gt;留在本机（终点）&lt;/Text&gt;&#10;                &lt;/Box&gt;&#10;            &lt;/Box&gt;&#10;            &lt;Box style={{ padding: '16px 20px', background: 'rgba(79,224,176,0.10)', borderRadius: 10 }}&gt;&#10;                &lt;Text style={{ fontSize: 16, color: '#E8EEF7', opacity: 0.9, lineHeight: 1.6 }}&gt;云端通道是&lt;span style={{ color: '#4FE0B0' }}&gt;可选&lt;/span&gt;的：开启后也只发送用户输入的那一句话，不发送锚点列表、设置或设备信息；密钥仅存本机，导出备份也不会带出。&lt;/Text&gt;&#10;            &lt;/Box&gt;&#10;        &lt;/Box&gt;&#10;    &lt;/Box&gt;&#10;    &lt;Box style={{ height: 60, flexDirection: 'row', alignItems: 'center', justifyContent: 'space-between' }}&gt;&#10;        &lt;Text style={{ fontSize: 14, color: '#E8EEF7', opacity: 0.42 }}&gt;知歇 ZhiXie · V1.0.0&lt;/Text&gt;&#10;        &lt;Text style={{ fontSize: 14, fontFamily: 'Consolas', color: '#E8EEF7', opacity: 0.42 }}&gt;14 / 18&lt;/Text&gt;&#10;    &lt;/Box&gt;&#10;&lt;/Slide&gt;&#10;"/>
+        <p:cNvPr id="111" name=""/>
         <p:cNvGrpSpPr/>
         <p:nvPr/>
       </p:nvGrpSpPr>
@@ -5060,7 +5065,10 @@
         </p:spPr>
         <p:txBody>
           <a:bodyPr/>
-          <a:p/>
+          <a:p>
+            <a:pPr/>
+            <a:endParaRPr/>
+          </a:p>
         </p:txBody>
       </p:sp>
       <p:sp>
@@ -5130,7 +5138,10 @@
         </p:spPr>
         <p:txBody>
           <a:bodyPr/>
-          <a:p/>
+          <a:p>
+            <a:pPr/>
+            <a:endParaRPr/>
+          </a:p>
         </p:txBody>
       </p:sp>
       <p:sp>
@@ -5470,7 +5481,10 @@
         </p:spPr>
         <p:txBody>
           <a:bodyPr/>
-          <a:p/>
+          <a:p>
+            <a:pPr/>
+            <a:endParaRPr/>
+          </a:p>
         </p:txBody>
       </p:sp>
       <p:pic>
@@ -5564,7 +5578,10 @@
         </p:spPr>
         <p:txBody>
           <a:bodyPr/>
-          <a:p/>
+          <a:p>
+            <a:pPr/>
+            <a:endParaRPr/>
+          </a:p>
         </p:txBody>
       </p:sp>
       <p:sp>
@@ -5913,7 +5930,7 @@
   <p:cSld>
     <p:spTree>
       <p:nvGrpSpPr>
-        <p:cNvPr id="134" name="" descr="&lt;Slide style={{ width: 1280, height: 720, background: '#0B1220', padding: '20px 64px' }}&gt;&#10;    &lt;Box style={{ height: 100, flexDirection: 'row', alignItems: 'flex-end', justifyContent: 'space-between', paddingBottom: 18 }}&gt;&#10;        &lt;Box style={{ flexDirection: 'column', gap: 6 }}&gt;&#10;            &lt;Text style={{ fontSize: 36, fontWeight: 'bold', color: '#E8EEF7' }}&gt;谁在什么时候用&lt;/Text&gt;&#10;            &lt;Text style={{ fontSize: 16, color: '#E8EEF7', opacity: 0.55, letterSpacing: 1 }}&gt;四类场景，一个主要人群&lt;/Text&gt;&#10;        &lt;/Box&gt;&#10;        &lt;Text style={{ fontSize: 14, fontFamily: 'Consolas', color: '#E8EEF7', opacity: 0.35 }}&gt;15&lt;/Text&gt;&#10;    &lt;/Box&gt;&#10;    &lt;Box style={{ height: 500, flexDirection: 'row', gap: 32 }}&gt;&#10;        &lt;Box style={{ width: 700, flexDirection: 'column', gap: 12 }}&gt;&#10;            &lt;Box style={{ height: 114, flexDirection: 'column', gap: 8, padding: '16px 20px', background: 'rgba(79,224,176,0.12)', border: '1px solid #4FE0B0', borderRadius: 12 }}&gt;&#10;                &lt;Box style={{ flexDirection: 'row', alignItems: 'center', justifyContent: 'space-between' }}&gt;&#10;                    &lt;Text style={{ fontSize: 20, fontWeight: 'bold', color: '#E8EEF7' }}&gt;高校机房与实训室&lt;/Text&gt;&#10;                    &lt;Text style={{ fontSize: 13, fontFamily: 'Consolas', color: '#4FE0B0' }}&gt;主场景&lt;/Text&gt;&#10;                &lt;/Box&gt;&#10;                &lt;Text style={{ fontSize: 15, color: '#E8EEF7', opacity: 0.82, lineHeight: 1.55 }}&gt;学生长时间上机实训，教师希望统一引入休息节律；弹窗文案可换成校风文案，零账号、零联网，适合机房批量部署。&lt;/Text&gt;&#10;            &lt;/Box&gt;&#10;            &lt;Box style={{ height: 114, flexDirection: 'column', gap: 8, padding: '16px 20px', background: 'rgba(232,238,247,0.04)', border: '1px solid rgba(232,238,247,0.10)', borderRadius: 12 }}&gt;&#10;                &lt;Text style={{ fontSize: 20, fontWeight: 'bold', color: '#E8EEF7' }}&gt;备考与自学&lt;/Text&gt;&#10;                &lt;Text style={{ fontSize: 15, color: '#E8EEF7', opacity: 0.7, lineHeight: 1.55 }}&gt;番茄式节奏但不拘泥于固定 25 分钟：休息间隔与提示语随时可调，语言表达自由，无需迁就关键词模板。&lt;/Text&gt;&#10;            &lt;/Box&gt;&#10;            &lt;Box style={{ height: 114, flexDirection: 'column', gap: 8, padding: '16px 20px', background: 'rgba(232,238,247,0.04)', border: '1px solid rgba(232,238,247,0.10)', borderRadius: 12 }}&gt;&#10;                &lt;Text style={{ fontSize: 20, fontWeight: 'bold', color: '#E8EEF7' }}&gt;远程办公与自由职业&lt;/Text&gt;&#10;                &lt;Text style={{ fontSize: 15, color: '#E8EEF7', opacity: 0.7, lineHeight: 1.55 }}&gt;久坐人群需要&quot;到点真正离开屏幕&quot;的约束力：可附加锁屏 / 关机 / 重启，触发前有 60 秒可撤销倒计时。&lt;/Text&gt;&#10;            &lt;/Box&gt;&#10;            &lt;Box style={{ height: 114, flexDirection: 'column', gap: 8, padding: '16px 20px', background: 'rgba(232,238,247,0.04)', border: '1px solid rgba(232,238,247,0.10)', borderRadius: 12 }}&gt;&#10;                &lt;Text style={{ fontSize: 20, fontWeight: 'bold', color: '#E8EEF7' }}&gt;家庭电脑&lt;/Text&gt;&#10;                &lt;Text style={{ fontSize: 15, color: '#E8EEF7', opacity: 0.7, lineHeight: 1.55 }}&gt;家长为孩子管理电脑使用时段：每天 / 每周 / 每月重复锚点，到点弹窗并可锁屏，无需为孩子注册任何账号。&lt;/Text&gt;&#10;            &lt;/Box&gt;&#10;        &lt;/Box&gt;&#10;        &lt;Box style={{ flex: 1, flexDirection: 'column', gap: 16 }}&gt;&#10;            &lt;Box style={{ height: 262, flexDirection: 'column', gap: 14, padding: 22, background: 'rgba(232,238,247,0.05)', borderRadius: 12 }}&gt;&#10;                &lt;Text style={{ fontSize: 14, fontFamily: 'Consolas', color: '#4FE0B0', letterSpacing: 2 }}&gt;主要用户&lt;/Text&gt;&#10;                &lt;Text style={{ fontSize: 21, fontWeight: 'bold', color: '#E8EEF7', lineHeight: 1.45 }}&gt;日均在电脑前 4 小时以上的&lt;br /&gt;学生与年轻职场人&lt;/Text&gt;&#10;                &lt;Text style={{ fontSize: 15, color: '#E8EEF7', opacity: 0.7, lineHeight: 1.6 }}&gt;典型画像：知道自己&quot;该休息&quot;，但一进入专注状态就忘记时间；嫌传统提醒工具配置繁琐，更愿意&quot;说一句话&quot;。&lt;/Text&gt;&#10;                &lt;Box style={{ marginTop: 'auto', paddingTop: 12, borderTop: '1px solid rgba(232,238,247,0.14)' }}&gt;&#10;                    &lt;Text style={{ fontSize: 14, color: '#E8EEF7', opacity: 0.55, lineHeight: 1.5 }}&gt;年龄区间约 18—30 岁。&lt;/Text&gt;&#10;                &lt;/Box&gt;&#10;            &lt;/Box&gt;&#10;            &lt;Box style={{ flex: 1, flexDirection: 'column', gap: 10, padding: 22, background: 'rgba(232,238,247,0.04)', border: '1px solid rgba(232,238,247,0.10)', borderRadius: 12 }}&gt;&#10;                &lt;Text style={{ fontSize: 14, fontFamily: 'Consolas', color: '#4FE0B0', letterSpacing: 2 }}&gt;次要用户&lt;/Text&gt;&#10;                &lt;Text style={{ fontSize: 17, color: '#E8EEF7', opacity: 0.85, lineHeight: 1.55 }}&gt;家长（孩子用电脑时段管理）&lt;br /&gt;教师 / 机房管理员（统一休息节律）&lt;/Text&gt;&#10;            &lt;/Box&gt;&#10;        &lt;/Box&gt;&#10;    &lt;/Box&gt;&#10;    &lt;Box style={{ height: 60, flexDirection: 'row', alignItems: 'center', justifyContent: 'space-between' }}&gt;&#10;        &lt;Text style={{ fontSize: 14, color: '#E8EEF7', opacity: 0.42 }}&gt;知歇 ZhiXie · V1.0.0&lt;/Text&gt;&#10;        &lt;Text style={{ fontSize: 14, fontFamily: 'Consolas', color: '#E8EEF7', opacity: 0.42 }}&gt;15 / 18&lt;/Text&gt;&#10;    &lt;/Box&gt;&#10;&lt;/Slide&gt;&#10;"/>
+        <p:cNvPr id="134" name=""/>
         <p:cNvGrpSpPr/>
         <p:nvPr/>
       </p:nvGrpSpPr>
@@ -5946,7 +5963,10 @@
         </p:spPr>
         <p:txBody>
           <a:bodyPr/>
-          <a:p/>
+          <a:p>
+            <a:pPr/>
+            <a:endParaRPr/>
+          </a:p>
         </p:txBody>
       </p:sp>
       <p:sp>
@@ -6014,7 +6034,10 @@
         </p:spPr>
         <p:txBody>
           <a:bodyPr/>
-          <a:p/>
+          <a:p>
+            <a:pPr/>
+            <a:endParaRPr/>
+          </a:p>
         </p:txBody>
       </p:sp>
       <p:sp>
@@ -6119,7 +6142,10 @@
         </p:spPr>
         <p:txBody>
           <a:bodyPr/>
-          <a:p/>
+          <a:p>
+            <a:pPr/>
+            <a:endParaRPr/>
+          </a:p>
         </p:txBody>
       </p:sp>
       <p:sp>
@@ -6189,7 +6215,10 @@
         </p:spPr>
         <p:txBody>
           <a:bodyPr/>
-          <a:p/>
+          <a:p>
+            <a:pPr/>
+            <a:endParaRPr/>
+          </a:p>
         </p:txBody>
       </p:sp>
       <p:sp>
@@ -6259,7 +6288,10 @@
         </p:spPr>
         <p:txBody>
           <a:bodyPr/>
-          <a:p/>
+          <a:p>
+            <a:pPr/>
+            <a:endParaRPr/>
+          </a:p>
         </p:txBody>
       </p:sp>
       <p:sp>
@@ -6322,7 +6354,10 @@
         </p:spPr>
         <p:txBody>
           <a:bodyPr/>
-          <a:p/>
+          <a:p>
+            <a:pPr/>
+            <a:endParaRPr/>
+          </a:p>
         </p:txBody>
       </p:sp>
       <p:sp>
@@ -6472,7 +6507,10 @@
         </p:spPr>
         <p:txBody>
           <a:bodyPr/>
-          <a:p/>
+          <a:p>
+            <a:pPr/>
+            <a:endParaRPr/>
+          </a:p>
         </p:txBody>
       </p:sp>
       <p:sp>
@@ -6507,7 +6545,10 @@
         </p:spPr>
         <p:txBody>
           <a:bodyPr/>
-          <a:p/>
+          <a:p>
+            <a:pPr/>
+            <a:endParaRPr/>
+          </a:p>
         </p:txBody>
       </p:sp>
       <p:sp>
@@ -7340,7 +7381,7 @@
   <p:cSld>
     <p:spTree>
       <p:nvGrpSpPr>
-        <p:cNvPr id="163" name="" descr="&lt;Slide style={{ width: 1280, height: 720, background: '#0B1220', padding: '20px 64px' }}&gt;&#10;    &lt;Box style={{ height: 100, flexDirection: 'row', alignItems: 'flex-end', justifyContent: 'space-between', paddingBottom: 18 }}&gt;&#10;        &lt;Box style={{ flexDirection: 'column', gap: 6 }}&gt;&#10;            &lt;Text style={{ fontSize: 36, fontWeight: 'bold', color: '#E8EEF7' }}&gt;五个创新点&lt;/Text&gt;&#10;            &lt;Text style={{ fontSize: 16, color: '#E8EEF7', opacity: 0.55, letterSpacing: 1 }}&gt;每条都落到一个具体动作，不只是概念&lt;/Text&gt;&#10;        &lt;/Box&gt;&#10;        &lt;Text style={{ fontSize: 14, fontFamily: 'Consolas', color: '#4FE0B0', opacity: 0.8 }}&gt;核心创新&lt;/Text&gt;&#10;    &lt;/Box&gt;&#10;    &lt;Box style={{ height: 500, flexDirection: 'row', gap: 36 }}&gt;&#10;        &lt;Box style={{ width: 332, flexDirection: 'column', justifyContent: 'space-between', padding: 24, background: 'rgba(79,224,176,0.08)', border: '1px solid rgba(79,224,176,0.35)', borderRadius: 14 }}&gt;&#10;            &lt;Box style={{ flexDirection: 'column', gap: 14 }}&gt;&#10;                &lt;Text style={{ fontSize: 26, fontWeight: 'bold', color: '#E8EEF7', lineHeight: 1.4 }}&gt;从交互到工程的&lt;br /&gt;五个差异点&lt;/Text&gt;&#10;                &lt;Box style={{ height: 3, width: 80, background: 'linear-gradient(135deg, #4FE0B0 0%, #2E9E8F 100%)', borderRadius: 2 }} /&gt;&#10;                &lt;Text style={{ fontSize: 16, color: '#E8EEF7', opacity: 0.72, lineHeight: 1.6 }}&gt;前三条解决&quot;好不好用&quot;，第四条回答&quot;怎么做的&quot;，第五条说明&quot;站什么立场&quot;。&lt;/Text&gt;&#10;            &lt;/Box&gt;&#10;            &lt;Text style={{ fontSize: 15, color: '#E8EEF7', opacity: 0.6, lineHeight: 1.6 }}&gt;其中第四条是本项目作为 AIGC 作品最想强调的开发方式本身。&lt;/Text&gt;&#10;        &lt;/Box&gt;&#10;        &lt;Box style={{ flex: 1, flexDirection: 'column', gap: 12 }}&gt;&#10;            &lt;Box style={{ height: 84, flexDirection: 'row', alignItems: 'center', gap: 18, padding: '0 20px', background: 'rgba(232,238,247,0.04)', border: '1px solid rgba(232,238,247,0.10)', borderRadius: 10 }}&gt;&#10;                &lt;Text style={{ fontSize: 40, fontWeight: 'bold', fontFamily: 'Consolas', color: '#4FE0B0', lineHeight: 1 }}&gt;01&lt;/Text&gt;&#10;                &lt;Box style={{ flexDirection: 'column', gap: 4 }}&gt;&#10;                    &lt;Text style={{ fontSize: 19, fontWeight: 'bold', color: '#E8EEF7' }}&gt;一句话生成提醒规则&lt;/Text&gt;&#10;                    &lt;Text style={{ fontSize: 15, color: '#E8EEF7', opacity: 0.65 }}&gt;意味着：配置门槛从&quot;学一套概念&quot;降到&quot;说一句话&quot;。&lt;/Text&gt;&#10;                &lt;/Box&gt;&#10;            &lt;/Box&gt;&#10;            &lt;Box style={{ height: 84, flexDirection: 'row', alignItems: 'center', gap: 18, padding: '0 20px', background: 'rgba(232,238,247,0.04)', border: '1px solid rgba(232,238,247,0.10)', borderRadius: 10 }}&gt;&#10;                &lt;Text style={{ fontSize: 40, fontWeight: 'bold', fontFamily: 'Consolas', color: '#4FE0B0', lineHeight: 1 }}&gt;02&lt;/Text&gt;&#10;                &lt;Box style={{ flexDirection: 'column', gap: 4 }}&gt;&#10;                    &lt;Text style={{ fontSize: 19, fontWeight: 'bold', color: '#E8EEF7' }}&gt;云端 + 本机双通道&lt;/Text&gt;&#10;                    &lt;Text style={{ fontSize: 15, color: '#E8EEF7', opacity: 0.65 }}&gt;意味着：既拿到大模型的理解力，又不牺牲离线可用性。&lt;/Text&gt;&#10;                &lt;/Box&gt;&#10;            &lt;/Box&gt;&#10;            &lt;Box style={{ height: 84, flexDirection: 'row', alignItems: 'center', gap: 18, padding: '0 20px', background: 'rgba(232,238,247,0.04)', border: '1px solid rgba(232,238,247,0.10)', borderRadius: 10 }}&gt;&#10;                &lt;Text style={{ fontSize: 40, fontWeight: 'bold', fontFamily: 'Consolas', color: '#4FE0B0', lineHeight: 1 }}&gt;03&lt;/Text&gt;&#10;                &lt;Box style={{ flexDirection: 'column', gap: 4 }}&gt;&#10;                    &lt;Text style={{ fontSize: 19, fontWeight: 'bold', color: '#E8EEF7' }}&gt;校验优先的落地设计&lt;/Text&gt;&#10;                    &lt;Text style={{ fontSize: 15, color: '#E8EEF7', opacity: 0.65 }}&gt;意味着：AI 的不确定性被挡在用户数据之外。&lt;/Text&gt;&#10;                &lt;/Box&gt;&#10;            &lt;/Box&gt;&#10;            &lt;Box style={{ height: 84, flexDirection: 'row', alignItems: 'center', gap: 18, padding: '0 20px', background: 'rgba(232,238,247,0.04)', border: '1px solid rgba(232,238,247,0.10)', borderRadius: 10 }}&gt;&#10;                &lt;Text style={{ fontSize: 40, fontWeight: 'bold', fontFamily: 'Consolas', color: '#4FE0B0', lineHeight: 1 }}&gt;04&lt;/Text&gt;&#10;                &lt;Box style={{ flexDirection: 'column', gap: 4 }}&gt;&#10;                    &lt;Text style={{ fontSize: 19, fontWeight: 'bold', color: '#E8EEF7' }}&gt;人机协同的开发范式&lt;/Text&gt;&#10;                    &lt;Text style={{ fontSize: 15, color: '#E8EEF7', opacity: 0.65 }}&gt;意味着：学生独立主导，AI 辅助实现，138 项测试形成闭环。&lt;/Text&gt;&#10;                &lt;/Box&gt;&#10;            &lt;/Box&gt;&#10;            &lt;Box style={{ height: 84, flexDirection: 'row', alignItems: 'center', gap: 18, padding: '0 20px', background: 'rgba(232,238,247,0.04)', border: '1px solid rgba(232,238,247,0.10)', borderRadius: 10 }}&gt;&#10;                &lt;Text style={{ fontSize: 40, fontWeight: 'bold', fontFamily: 'Consolas', color: '#4FE0B0', lineHeight: 1 }}&gt;05&lt;/Text&gt;&#10;                &lt;Box style={{ flexDirection: 'column', gap: 4 }}&gt;&#10;                    &lt;Text style={{ fontSize: 19, fontWeight: 'bold', color: '#E8EEF7' }}&gt;温和的休息倡议&lt;/Text&gt;&#10;                    &lt;Text style={{ fontSize: 15, color: '#E8EEF7', opacity: 0.65 }}&gt;意味着：产品立场是&quot;知时而歇&quot;，不是效率压榨。&lt;/Text&gt;&#10;                &lt;/Box&gt;&#10;            &lt;/Box&gt;&#10;        &lt;/Box&gt;&#10;    &lt;/Box&gt;&#10;    &lt;Box style={{ height: 60, flexDirection: 'row', alignItems: 'center', justifyContent: 'space-between' }}&gt;&#10;        &lt;Text style={{ fontSize: 14, color: '#E8EEF7', opacity: 0.42 }}&gt;知歇 ZhiXie · V1.0.0&lt;/Text&gt;&#10;        &lt;Text style={{ fontSize: 14, fontFamily: 'Consolas', color: '#E8EEF7', opacity: 0.42 }}&gt;16 / 18&lt;/Text&gt;&#10;    &lt;/Box&gt;&#10;&lt;/Slide&gt;&#10;"/>
+        <p:cNvPr id="163" name=""/>
         <p:cNvGrpSpPr/>
         <p:nvPr/>
       </p:nvGrpSpPr>
@@ -7373,7 +7414,10 @@
         </p:spPr>
         <p:txBody>
           <a:bodyPr/>
-          <a:p/>
+          <a:p>
+            <a:pPr/>
+            <a:endParaRPr/>
+          </a:p>
         </p:txBody>
       </p:sp>
       <p:sp>
@@ -7443,7 +7487,10 @@
         </p:spPr>
         <p:txBody>
           <a:bodyPr/>
-          <a:p/>
+          <a:p>
+            <a:pPr/>
+            <a:endParaRPr/>
+          </a:p>
         </p:txBody>
       </p:sp>
       <p:sp>
@@ -7530,7 +7577,10 @@
         </p:spPr>
         <p:txBody>
           <a:bodyPr/>
-          <a:p/>
+          <a:p>
+            <a:pPr/>
+            <a:endParaRPr/>
+          </a:p>
         </p:txBody>
       </p:sp>
       <p:sp>
@@ -7565,7 +7615,10 @@
         </p:spPr>
         <p:txBody>
           <a:bodyPr/>
-          <a:p/>
+          <a:p>
+            <a:pPr/>
+            <a:endParaRPr/>
+          </a:p>
         </p:txBody>
       </p:sp>
       <p:sp>
@@ -7670,7 +7723,10 @@
         </p:spPr>
         <p:txBody>
           <a:bodyPr/>
-          <a:p/>
+          <a:p>
+            <a:pPr/>
+            <a:endParaRPr/>
+          </a:p>
         </p:txBody>
       </p:sp>
       <p:sp>
@@ -7795,7 +7851,10 @@
         </p:spPr>
         <p:txBody>
           <a:bodyPr/>
-          <a:p/>
+          <a:p>
+            <a:pPr/>
+            <a:endParaRPr/>
+          </a:p>
         </p:txBody>
       </p:sp>
       <p:sp>
@@ -7900,7 +7959,10 @@
         </p:spPr>
         <p:txBody>
           <a:bodyPr/>
-          <a:p/>
+          <a:p>
+            <a:pPr/>
+            <a:endParaRPr/>
+          </a:p>
         </p:txBody>
       </p:sp>
       <p:sp>
@@ -8005,7 +8067,10 @@
         </p:spPr>
         <p:txBody>
           <a:bodyPr/>
-          <a:p/>
+          <a:p>
+            <a:pPr/>
+            <a:endParaRPr/>
+          </a:p>
         </p:txBody>
       </p:sp>
       <p:sp>
@@ -8895,7 +8960,7 @@
   <p:cSld>
     <p:spTree>
       <p:nvGrpSpPr>
-        <p:cNvPr id="195" name="" descr="&lt;Slide style={{ width: 1280, height: 720, background: '#0B1220', padding: '20px 64px' }}&gt;&#10;    &lt;Box style={{ height: 100, flexDirection: 'row', alignItems: 'flex-end', justifyContent: 'space-between', paddingBottom: 18 }}&gt;&#10;        &lt;Box style={{ flexDirection: 'column', gap: 6 }}&gt;&#10;            &lt;Text style={{ fontSize: 36, fontWeight: 'bold', color: '#E8EEF7' }}&gt;对比与价值&lt;/Text&gt;&#10;            &lt;Text style={{ fontSize: 16, color: '#E8EEF7', opacity: 0.55, letterSpacing: 1 }}&gt;差异化不在&quot;提醒&quot;，而在创建成本与约束力&lt;/Text&gt;&#10;        &lt;/Box&gt;&#10;        &lt;Text style={{ fontSize: 14, fontFamily: 'Consolas', color: '#E8EEF7', opacity: 0.35 }}&gt;17&lt;/Text&gt;&#10;    &lt;/Box&gt;&#10;    &lt;Box style={{ height: 500, flexDirection: 'column', gap: 20 }}&gt;&#10;        &lt;Table&#10;            style={{ width: 1152, height: 292 }}&#10;            defaultTextStyle={{ fontSize: 15, textAlign: 'center', color: '#E8EEF7' }}&#10;            defaultCellStyle={{&#10;                border: {&#10;                    left: { width: 1, color: 'rgba(232,238,247,0.12)' },&#10;                    right: { width: 1, color: 'rgba(232,238,247,0.12)' },&#10;                    top: { width: 1, color: 'rgba(232,238,247,0.12)' },&#10;                    bottom: { width: 1, color: 'rgba(232,238,247,0.12)' },&#10;                },&#10;            }}&#10;            cells={[&#10;                [&#10;                    { text: '对比维度', textStyle: { bold: true, color: '#0B1220' }, cellStyle: { background: { color: '#E8EEF7' } } },&#10;                    { text: '系统自带提醒', textStyle: { bold: true, color: '#0B1220' }, cellStyle: { background: { color: '#E8EEF7' } } },&#10;                    { text: '番茄钟类工具', textStyle: { bold: true, color: '#0B1220' }, cellStyle: { background: { color: '#E8EEF7' } } },&#10;                    { text: '知歇 ZhiXie', textStyle: { bold: true, color: '#0B1220' }, cellStyle: { background: { color: '#4FE0B0' } } },&#10;                ],&#10;                [&#10;                    { text: '一句话创建提醒', cellStyle: { background: { color: 'rgba(232,238,247,0.05)' } } },&#10;                    '不支持',&#10;                    '不支持',&#10;                    { text: '支持', textStyle: { bold: true, color: '#4FE0B0' } },&#10;                ],&#10;                [&#10;                    '离线可用',&#10;                    '支持',&#10;                    '部分需联网',&#10;                    { text: '支持（含智能体）', textStyle: { bold: true, color: '#4FE0B0' } },&#10;                ],&#10;                [&#10;                    { text: '系统操作 · 锁屏 / 关机', cellStyle: { background: { color: 'rgba(232,238,247,0.05)' } } },&#10;                    '部分支持',&#10;                    '不支持',&#10;                    { text: '支持', textStyle: { bold: true, color: '#4FE0B0' } },&#10;                ],&#10;                [&#10;                    '数据本地化 · 无需账号',&#10;                    '支持',&#10;                    '部分需登录',&#10;                    { text: '支持', textStyle: { bold: true, color: '#4FE0B0' } },&#10;                ],&#10;                [&#10;                    { text: 'AI 输出经校验后落库', cellStyle: { background: { color: 'rgba(232,238,247,0.05)' } } },&#10;                    '—',&#10;                    '—',&#10;                    { text: '支持', textStyle: { bold: true, color: '#4FE0B0' } },&#10;                ],&#10;                [&#10;                    '跨平台（同一套代码）',&#10;                    '各自独立',&#10;                    '部分',&#10;                    { text: '支持', textStyle: { bold: true, color: '#4FE0B0' } },&#10;                ],&#10;            ]}&#10;        /&gt;&#10;        &lt;Box style={{ flex: 1, flexDirection: 'row', gap: 20 }}&gt;&#10;            &lt;Box style={{ flex: 1, flexDirection: 'column', gap: 8, padding: 18, background: 'rgba(232,238,247,0.05)', borderRadius: 12 }}&gt;&#10;                &lt;Text style={{ fontSize: 19, fontWeight: 'bold', color: '#4FE0B0' }}&gt;健康价值&lt;/Text&gt;&#10;                &lt;Text style={{ fontSize: 15, color: '#E8EEF7', opacity: 0.72, lineHeight: 1.6 }}&gt;久坐是学生与办公人群的高频健康风险，定时强制休息是最直接的干预手段。&lt;/Text&gt;&#10;            &lt;/Box&gt;&#10;            &lt;Box style={{ flex: 1, flexDirection: 'column', gap: 8, padding: 18, background: 'rgba(232,238,247,0.05)', borderRadius: 12 }}&gt;&#10;                &lt;Text style={{ fontSize: 19, fontWeight: 'bold', color: '#4FE0B0' }}&gt;教育价值&lt;/Text&gt;&#10;                &lt;Text style={{ fontSize: 15, color: '#E8EEF7', opacity: 0.72, lineHeight: 1.6 }}&gt;为&quot;AI 辅助开发&quot;提供一个可检验的案例：用 AI 把一个人的想法做成工程级作品。&lt;/Text&gt;&#10;            &lt;/Box&gt;&#10;            &lt;Box style={{ flex: 1, flexDirection: 'column', gap: 8, padding: 18, background: 'rgba(232,238,247,0.05)', borderRadius: 12 }}&gt;&#10;                &lt;Text style={{ fontSize: 19, fontWeight: 'bold', color: '#4FE0B0' }}&gt;推广价值&lt;/Text&gt;&#10;                &lt;Text style={{ fontSize: 15, color: '#E8EEF7', opacity: 0.72, lineHeight: 1.6 }}&gt;零账号、默认零联网、零广告，适合机房批量部署与家庭场景推广。&lt;/Text&gt;&#10;            &lt;/Box&gt;&#10;        &lt;/Box&gt;&#10;    &lt;/Box&gt;&#10;    &lt;Box style={{ height: 60, flexDirection: 'row', alignItems: 'center', justifyContent: 'space-between' }}&gt;&#10;        &lt;Text style={{ fontSize: 14, color: '#E8EEF7', opacity: 0.42 }}&gt;知歇 ZhiXie · V1.0.0&lt;/Text&gt;&#10;        &lt;Text style={{ fontSize: 14, fontFamily: 'Consolas', color: '#E8EEF7', opacity: 0.42 }}&gt;17 / 18&lt;/Text&gt;&#10;    &lt;/Box&gt;&#10;&lt;/Slide&gt;&#10;"/>
+        <p:cNvPr id="195" name=""/>
         <p:cNvGrpSpPr/>
         <p:nvPr/>
       </p:nvGrpSpPr>
@@ -8928,7 +8993,10 @@
         </p:spPr>
         <p:txBody>
           <a:bodyPr/>
-          <a:p/>
+          <a:p>
+            <a:pPr/>
+            <a:endParaRPr/>
+          </a:p>
         </p:txBody>
       </p:sp>
       <p:sp>
@@ -10206,7 +10274,10 @@
         </p:spPr>
         <p:txBody>
           <a:bodyPr/>
-          <a:p/>
+          <a:p>
+            <a:pPr/>
+            <a:endParaRPr/>
+          </a:p>
         </p:txBody>
       </p:sp>
       <p:sp>
@@ -10269,7 +10340,10 @@
         </p:spPr>
         <p:txBody>
           <a:bodyPr/>
-          <a:p/>
+          <a:p>
+            <a:pPr/>
+            <a:endParaRPr/>
+          </a:p>
         </p:txBody>
       </p:sp>
       <p:sp>
@@ -10332,7 +10406,10 @@
         </p:spPr>
         <p:txBody>
           <a:bodyPr/>
-          <a:p/>
+          <a:p>
+            <a:pPr/>
+            <a:endParaRPr/>
+          </a:p>
         </p:txBody>
       </p:sp>
       <p:sp>
@@ -10777,7 +10854,7 @@
   <p:cSld>
     <p:spTree>
       <p:nvGrpSpPr>
-        <p:cNvPr id="212" name="" descr="&lt;Slide style={{ width: 1280, height: 720, background: '#0B1220', padding: '20px 64px' }}&gt;&#10;    &lt;Box style={{ height: 680, flexDirection: 'column', justifyContent: 'center', alignItems: 'center', gap: 22 }}&gt;&#10;        &lt;svg width={520} height={168} viewBox='0 0 520 168'&gt;&#10;            &lt;circle cx='260' cy='168' r='150' fill='none' stroke='#4FE0B0' strokeWidth='1' opacity='0.18' /&gt;&#10;            &lt;circle cx='260' cy='168' r='112' fill='none' stroke='#4FE0B0' strokeWidth='1' opacity='0.30' /&gt;&#10;            &lt;circle cx='260' cy='168' r='74' fill='none' stroke='#4FE0B0' strokeWidth='1.5' opacity='0.50' /&gt;&#10;            &lt;path d='M110 168 A150 150 0 0 1 410 168' fill='none' stroke='#4FE0B0' strokeWidth='3' opacity='0.9' /&gt;&#10;            &lt;circle cx='260' cy='18' r='6' fill='#4FE0B0' /&gt;&#10;            &lt;path d='M260 18 L260 44' fill='none' stroke='#4FE0B0' strokeWidth='2' opacity='0.6' /&gt;&#10;        &lt;/svg&gt;&#10;        &lt;Text style={{ fontSize: 56, fontWeight: 'bold', color: '#E8EEF7', letterSpacing: 4 }}&gt;知时而歇，张弛有度&lt;/Text&gt;&#10;        &lt;Text style={{ fontSize: 20, color: '#4FE0B0', letterSpacing: 2 }}&gt;知歇 ZhiXie · 会听人话的桌面休息提醒&lt;/Text&gt;&#10;        &lt;Box style={{ height: 3, width: 140, background: 'linear-gradient(135deg, #4FE0B0 0%, #2E9E8F 100%)', borderRadius: 2, marginTop: 6 }} /&gt;&#10;        &lt;Text style={{ fontSize: 17, color: '#E8EEF7', opacity: 0.62, marginTop: 4 }}&gt;我们希望做的，不是一个催你干活的工具，而是一个提醒你停下来的工具。&lt;/Text&gt;&#10;        &lt;Text style={{ fontSize: 16, color: '#E8EEF7', opacity: 0.5, letterSpacing: 1, marginTop: 10 }}&gt;无锡开放大学 · 指导教师 王敏 · 创新主赛道 AIGC 创新组&lt;/Text&gt;&#10;    &lt;/Box&gt;&#10;&lt;/Slide&gt;&#10;"/>
+        <p:cNvPr id="212" name=""/>
         <p:cNvGrpSpPr/>
         <p:nvPr/>
       </p:nvGrpSpPr>
@@ -10810,7 +10887,10 @@
         </p:spPr>
         <p:txBody>
           <a:bodyPr/>
-          <a:p/>
+          <a:p>
+            <a:pPr/>
+            <a:endParaRPr/>
+          </a:p>
         </p:txBody>
       </p:sp>
       <p:pic>
@@ -10965,7 +11045,10 @@
         </p:spPr>
         <p:txBody>
           <a:bodyPr/>
-          <a:p/>
+          <a:p>
+            <a:pPr/>
+            <a:endParaRPr/>
+          </a:p>
         </p:txBody>
       </p:sp>
       <p:sp>
@@ -11036,105 +11119,17 @@
                 <a:latin typeface="Microsoft YaHei"/>
                 <a:ea typeface="Microsoft YaHei"/>
               </a:rPr>
-              <a:t>无锡开放大学</a:t>
-            </a:r>
-            <a:r>
-              <a:rPr lang="en-US" sz="1200" spc="75">
-                <a:solidFill>
-                  <a:srgbClr val="E8EEF7">
-                    <a:alpha val="50000"/>
-                  </a:srgbClr>
-                </a:solidFill>
-                <a:latin typeface="Microsoft YaHei"/>
-                <a:ea typeface="Microsoft YaHei"/>
-              </a:rPr>
-              <a:t xml:space="preserve"> · </a:t>
-            </a:r>
-            <a:r>
-              <a:rPr lang="zh-CN" sz="1200" spc="75">
-                <a:solidFill>
-                  <a:srgbClr val="E8EEF7">
-                    <a:alpha val="50000"/>
-                  </a:srgbClr>
-                </a:solidFill>
-                <a:latin typeface="Microsoft YaHei"/>
-                <a:ea typeface="Microsoft YaHei"/>
-              </a:rPr>
-              <a:t>指导教师</a:t>
-            </a:r>
-            <a:r>
-              <a:rPr lang="en-US" sz="1200" spc="75">
-                <a:solidFill>
-                  <a:srgbClr val="E8EEF7">
-                    <a:alpha val="50000"/>
-                  </a:srgbClr>
-                </a:solidFill>
-                <a:latin typeface="Microsoft YaHei"/>
-                <a:ea typeface="Microsoft YaHei"/>
-              </a:rPr>
-              <a:t xml:space="preserve"> </a:t>
-            </a:r>
-            <a:r>
-              <a:rPr lang="zh-CN" sz="1200" spc="75">
-                <a:solidFill>
-                  <a:srgbClr val="E8EEF7">
-                    <a:alpha val="50000"/>
-                  </a:srgbClr>
-                </a:solidFill>
-                <a:latin typeface="Microsoft YaHei"/>
-                <a:ea typeface="Microsoft YaHei"/>
-              </a:rPr>
-              <a:t>王敏</a:t>
-            </a:r>
-            <a:r>
-              <a:rPr lang="en-US" sz="1200" spc="75">
-                <a:solidFill>
-                  <a:srgbClr val="E8EEF7">
-                    <a:alpha val="50000"/>
-                  </a:srgbClr>
-                </a:solidFill>
-                <a:latin typeface="Microsoft YaHei"/>
-                <a:ea typeface="Microsoft YaHei"/>
-              </a:rPr>
-              <a:t xml:space="preserve"> · </a:t>
-            </a:r>
-            <a:r>
-              <a:rPr lang="zh-CN" sz="1200" spc="75">
-                <a:solidFill>
-                  <a:srgbClr val="E8EEF7">
-                    <a:alpha val="50000"/>
-                  </a:srgbClr>
-                </a:solidFill>
-                <a:latin typeface="Microsoft YaHei"/>
-                <a:ea typeface="Microsoft YaHei"/>
-              </a:rPr>
-              <a:t>创新主赛道</a:t>
-            </a:r>
-            <a:r>
-              <a:rPr lang="en-US" sz="1200" spc="75">
-                <a:solidFill>
-                  <a:srgbClr val="E8EEF7">
-                    <a:alpha val="50000"/>
-                  </a:srgbClr>
-                </a:solidFill>
-                <a:latin typeface="Microsoft YaHei"/>
-                <a:ea typeface="Microsoft YaHei"/>
-              </a:rPr>
-              <a:t xml:space="preserve"> AIGC </a:t>
-            </a:r>
-            <a:r>
-              <a:rPr lang="zh-CN" sz="1200" spc="75">
-                <a:solidFill>
-                  <a:srgbClr val="E8EEF7">
-                    <a:alpha val="50000"/>
-                  </a:srgbClr>
-                </a:solidFill>
-                <a:latin typeface="Microsoft YaHei"/>
-                <a:ea typeface="Microsoft YaHei"/>
-              </a:rPr>
-              <a:t>创新组</a:t>
-            </a:r>
-            <a:endParaRPr/>
+              <a:t>创新主赛道 · AIGC 创新组</a:t>
+            </a:r>
+            <a:endParaRPr lang="zh-CN" sz="1200" spc="75">
+              <a:solidFill>
+                <a:srgbClr val="E8EEF7">
+                  <a:alpha val="50000"/>
+                </a:srgbClr>
+              </a:solidFill>
+              <a:latin typeface="Microsoft YaHei"/>
+              <a:ea typeface="Microsoft YaHei"/>
+            </a:endParaRPr>
           </a:p>
         </p:txBody>
       </p:sp>
@@ -11148,7 +11143,7 @@
   <p:cSld>
     <p:spTree>
       <p:nvGrpSpPr>
-        <p:cNvPr id="220" name="" descr="&lt;Slide style={{ width: 1280, height: 720, background: '#0B1220', padding: '20px 64px' }}&gt;&#10;    &lt;Box style={{ height: 100, flexDirection: 'row', alignItems: 'flex-end', justifyContent: 'space-between', paddingBottom: 18 }}&gt;&#10;        &lt;Box style={{ flexDirection: 'column', gap: 6 }}&gt;&#10;            &lt;Text style={{ fontSize: 36, fontWeight: 'bold', color: '#E8EEF7' }}&gt;目录&lt;/Text&gt;&#10;            &lt;Text style={{ fontSize: 16, color: '#E8EEF7', opacity: 0.55, letterSpacing: 1 }}&gt;三章，回答评委最关心的三个问题&lt;/Text&gt;&#10;        &lt;/Box&gt;&#10;        &lt;Text style={{ fontSize: 14, color: '#4FE0B0', letterSpacing: 3, opacity: 0.85 }}&gt;CONTENTS&lt;/Text&gt;&#10;    &lt;/Box&gt;&#10;    &lt;Box style={{ height: 500, flexDirection: 'row', gap: 44 }}&gt;&#10;        &lt;Box style={{ width: 288, flexDirection: 'column', justifyContent: 'center', gap: 20 }}&gt;&#10;            &lt;Text style={{ fontSize: 21, color: '#E8EEF7', opacity: 0.78, lineHeight: 1.7 }}&gt;需求是真的吗？&lt;br /&gt;智能体是怎么做的？&lt;br /&gt;工程上靠得住吗？&lt;/Text&gt;&#10;            &lt;Box style={{ height: 3, width: 88, background: 'linear-gradient(135deg, #4FE0B0 0%, #2E9E8F 100%)', borderRadius: 2 }} /&gt;&#10;            &lt;Text style={{ fontSize: 16, color: '#E8EEF7', opacity: 0.5, lineHeight: 1.6 }}&gt;本演示共 18 页，按路演 6—8 分钟节奏编排，每个数据均可现场核验。&lt;/Text&gt;&#10;        &lt;/Box&gt;&#10;        &lt;Box style={{ flex: 1, flexDirection: 'column', gap: 18, justifyContent: 'center' }}&gt;&#10;            &lt;Box style={{ flexDirection: 'row', alignItems: 'center', gap: 24, padding: '20px 24px', background: 'rgba(232,238,247,0.04)', border: '1px solid rgba(232,238,247,0.10)', borderRadius: 12 }}&gt;&#10;                &lt;Box style={{ width: 60, height: 60, borderRadius: 30, background: 'rgba(79,224,176,0.10)', justifyContent: 'center', alignItems: 'center' }}&gt;&#10;                    &lt;Text style={{ fontSize: 20, fontWeight: 'bold', fontFamily: 'Consolas', color: '#4FE0B0' }}&gt;01&lt;/Text&gt;&#10;                &lt;/Box&gt;&#10;                &lt;Box style={{ flexDirection: 'column', gap: 6 }}&gt;&#10;                    &lt;Text style={{ fontSize: 24, fontWeight: 'bold', color: '#E8EEF7' }}&gt;问题与定位&lt;/Text&gt;&#10;                    &lt;Text style={{ fontSize: 16, color: '#E8EEF7', opacity: 0.62, lineHeight: 1.5 }}&gt;现有提醒工具的两个毛病：配置门槛高、提醒机械；知歇的定位由此而来。&lt;/Text&gt;&#10;                &lt;/Box&gt;&#10;                &lt;Text style={{ fontSize: 14, color: '#4FE0B0', opacity: 0.85 }}&gt;P03–P05&lt;/Text&gt;&#10;            &lt;/Box&gt;&#10;            &lt;Box style={{ flexDirection: 'row', alignItems: 'center', gap: 24, padding: '20px 24px', background: 'rgba(232,238,247,0.04)', border: '1px solid rgba(232,238,247,0.10)', borderRadius: 12 }}&gt;&#10;                &lt;Box style={{ width: 60, height: 60, borderRadius: 30, background: 'rgba(79,224,176,0.10)', justifyContent: 'center', alignItems: 'center' }}&gt;&#10;                    &lt;Text style={{ fontSize: 20, fontWeight: 'bold', fontFamily: 'Consolas', color: '#4FE0B0' }}&gt;02&lt;/Text&gt;&#10;                &lt;/Box&gt;&#10;                &lt;Box style={{ flexDirection: 'column', gap: 6 }}&gt;&#10;                    &lt;Text style={{ fontSize: 24, fontWeight: 'bold', color: '#E8EEF7' }}&gt;智能体开发过程&lt;/Text&gt;&#10;                    &lt;Text style={{ fontSize: 16, color: '#E8EEF7', opacity: 0.62, lineHeight: 1.5 }}&gt;双通道架构、本机规则引擎、校验优先落库，以及低代码/无代码的使用方式。&lt;/Text&gt;&#10;                &lt;/Box&gt;&#10;                &lt;Text style={{ fontSize: 14, color: '#4FE0B0', opacity: 0.85 }}&gt;P06–P10&lt;/Text&gt;&#10;            &lt;/Box&gt;&#10;            &lt;Box style={{ flexDirection: 'row', alignItems: 'center', gap: 24, padding: '20px 24px', background: 'rgba(232,238,247,0.04)', border: '1px solid rgba(232,238,247,0.10)', borderRadius: 12 }}&gt;&#10;                &lt;Box style={{ width: 60, height: 60, borderRadius: 30, background: 'rgba(79,224,176,0.10)', justifyContent: 'center', alignItems: 'center' }}&gt;&#10;                    &lt;Text style={{ fontSize: 20, fontWeight: 'bold', fontFamily: 'Consolas', color: '#4FE0B0' }}&gt;03&lt;/Text&gt;&#10;                &lt;/Box&gt;&#10;                &lt;Box style={{ flexDirection: 'column', gap: 6 }}&gt;&#10;                    &lt;Text style={{ fontSize: 24, fontWeight: 'bold', color: '#E8EEF7' }}&gt;工程质量与应用价值&lt;/Text&gt;&#10;                    &lt;Text style={{ fontSize: 16, color: '#E8EEF7', opacity: 0.62, lineHeight: 1.5 }}&gt;138 项自动化测试、数据不出本机、适用场景、创新点与横向对比。&lt;/Text&gt;&#10;                &lt;/Box&gt;&#10;                &lt;Text style={{ fontSize: 14, color: '#4FE0B0', opacity: 0.85 }}&gt;P11–P17&lt;/Text&gt;&#10;            &lt;/Box&gt;&#10;        &lt;/Box&gt;&#10;    &lt;/Box&gt;&#10;    &lt;Box style={{ height: 60, flexDirection: 'row', alignItems: 'center', justifyContent: 'space-between' }}&gt;&#10;        &lt;Text style={{ fontSize: 14, color: '#E8EEF7', opacity: 0.42 }}&gt;知歇 ZhiXie · V1.0.0&lt;/Text&gt;&#10;        &lt;Text style={{ fontSize: 14, fontFamily: 'Consolas', color: '#E8EEF7', opacity: 0.42 }}&gt;02 / 18&lt;/Text&gt;&#10;    &lt;/Box&gt;&#10;&lt;/Slide&gt;&#10;"/>
+        <p:cNvPr id="220" name=""/>
         <p:cNvGrpSpPr/>
         <p:nvPr/>
       </p:nvGrpSpPr>
@@ -11181,7 +11176,10 @@
         </p:spPr>
         <p:txBody>
           <a:bodyPr/>
-          <a:p/>
+          <a:p>
+            <a:pPr/>
+            <a:endParaRPr/>
+          </a:p>
         </p:txBody>
       </p:sp>
       <p:sp>
@@ -11250,7 +11248,10 @@
         </p:spPr>
         <p:txBody>
           <a:bodyPr/>
-          <a:p/>
+          <a:p>
+            <a:pPr/>
+            <a:endParaRPr/>
+          </a:p>
         </p:txBody>
       </p:sp>
       <p:sp>
@@ -11285,7 +11286,10 @@
         </p:spPr>
         <p:txBody>
           <a:bodyPr/>
-          <a:p/>
+          <a:p>
+            <a:pPr/>
+            <a:endParaRPr/>
+          </a:p>
         </p:txBody>
       </p:sp>
       <p:sp>
@@ -11313,7 +11317,10 @@
         </p:spPr>
         <p:txBody>
           <a:bodyPr/>
-          <a:p/>
+          <a:p>
+            <a:pPr/>
+            <a:endParaRPr/>
+          </a:p>
         </p:txBody>
       </p:sp>
       <p:sp>
@@ -11418,7 +11425,10 @@
         </p:spPr>
         <p:txBody>
           <a:bodyPr/>
-          <a:p/>
+          <a:p>
+            <a:pPr/>
+            <a:endParaRPr/>
+          </a:p>
         </p:txBody>
       </p:sp>
       <p:sp>
@@ -11446,7 +11456,10 @@
         </p:spPr>
         <p:txBody>
           <a:bodyPr/>
-          <a:p/>
+          <a:p>
+            <a:pPr/>
+            <a:endParaRPr/>
+          </a:p>
         </p:txBody>
       </p:sp>
       <p:sp>
@@ -11551,7 +11564,10 @@
         </p:spPr>
         <p:txBody>
           <a:bodyPr/>
-          <a:p/>
+          <a:p>
+            <a:pPr/>
+            <a:endParaRPr/>
+          </a:p>
         </p:txBody>
       </p:sp>
       <p:sp>
@@ -11579,7 +11595,10 @@
         </p:spPr>
         <p:txBody>
           <a:bodyPr/>
-          <a:p/>
+          <a:p>
+            <a:pPr/>
+            <a:endParaRPr/>
+          </a:p>
         </p:txBody>
       </p:sp>
       <p:sp>
@@ -12244,7 +12263,7 @@
   <p:cSld>
     <p:spTree>
       <p:nvGrpSpPr>
-        <p:cNvPr id="248" name="" descr="&lt;Slide style={{ width: 1280, height: 720, background: '#0B1220', padding: '20px 64px' }}&gt;&#10;    &lt;Box style={{ height: 600, flexDirection: 'row', alignItems: 'center', gap: 64 }}&gt;&#10;        &lt;Text style={{ fontSize: 230, fontWeight: 'bold', fontFamily: 'Consolas', color: '#4FE0B0', opacity: 0.15, lineHeight: 1 }}&gt;01&lt;/Text&gt;&#10;        &lt;Box style={{ flexDirection: 'column', gap: 20, width: 540 }}&gt;&#10;            &lt;Text style={{ fontSize: 60, fontWeight: 'bold', color: '#E8EEF7', lineHeight: 1.15 }}&gt;问题与定位&lt;/Text&gt;&#10;            &lt;Box style={{ height: 4, width: 110, background: 'linear-gradient(135deg, #4FE0B0 0%, #2E9E8F 100%)', borderRadius: 2 }} /&gt;&#10;            &lt;Text style={{ fontSize: 20, color: '#E8EEF7', opacity: 0.72, lineHeight: 1.65 }}&gt;在系统自带提醒和番茄钟都存在的今天，为什么还需要一个知歇？&lt;br /&gt;这一章只讲清楚一件事：痛点在哪里。&lt;/Text&gt;&#10;            &lt;Text style={{ fontSize: 15, fontFamily: 'Consolas', color: '#4FE0B0', letterSpacing: 2 }}&gt;P03 – P05&lt;/Text&gt;&#10;        &lt;/Box&gt;&#10;    &lt;/Box&gt;&#10;    &lt;Box style={{ height: 60, flexDirection: 'row', alignItems: 'center', justifyContent: 'space-between' }}&gt;&#10;        &lt;Text style={{ fontSize: 14, color: '#E8EEF7', opacity: 0.42 }}&gt;知歇 ZhiXie · V1.0.0&lt;/Text&gt;&#10;        &lt;Text style={{ fontSize: 14, fontFamily: 'Consolas', color: '#E8EEF7', opacity: 0.42 }}&gt;03 / 18&lt;/Text&gt;&#10;    &lt;/Box&gt;&#10;&lt;/Slide&gt;&#10;"/>
+        <p:cNvPr id="248" name=""/>
         <p:cNvGrpSpPr/>
         <p:nvPr/>
       </p:nvGrpSpPr>
@@ -12277,7 +12296,10 @@
         </p:spPr>
         <p:txBody>
           <a:bodyPr/>
-          <a:p/>
+          <a:p>
+            <a:pPr/>
+            <a:endParaRPr/>
+          </a:p>
         </p:txBody>
       </p:sp>
       <p:sp>
@@ -12346,7 +12368,10 @@
         </p:spPr>
         <p:txBody>
           <a:bodyPr/>
-          <a:p/>
+          <a:p>
+            <a:pPr/>
+            <a:endParaRPr/>
+          </a:p>
         </p:txBody>
       </p:sp>
       <p:sp>
@@ -12576,7 +12601,7 @@
   <p:cSld>
     <p:spTree>
       <p:nvGrpSpPr>
-        <p:cNvPr id="257" name="" descr="&lt;Slide style={{ width: 1280, height: 720, background: '#0B1220', padding: '20px 64px' }}&gt;&#10;    &lt;Box style={{ height: 100, flexDirection: 'row', alignItems: 'flex-end', justifyContent: 'space-between', paddingBottom: 18 }}&gt;&#10;        &lt;Box style={{ flexDirection: 'column', gap: 6 }}&gt;&#10;            &lt;Text style={{ fontSize: 36, fontWeight: 'bold', color: '#E8EEF7' }}&gt;两个绕不开的毛病&lt;/Text&gt;&#10;            &lt;Text style={{ fontSize: 16, color: '#E8EEF7', opacity: 0.55, letterSpacing: 1 }}&gt;不是用户不想休息，是工具不好用&lt;/Text&gt;&#10;        &lt;/Box&gt;&#10;        &lt;Text style={{ fontSize: 14, fontFamily: 'Consolas', color: '#E8EEF7', opacity: 0.35 }}&gt;04&lt;/Text&gt;&#10;    &lt;/Box&gt;&#10;    &lt;Box style={{ height: 500, flexDirection: 'row', gap: 32 }}&gt;&#10;        &lt;Box style={{ width: 700, flexDirection: 'column', gap: 16, padding: 26, background: 'rgba(232,238,247,0.04)', border: '1px solid rgba(232,238,247,0.10)', borderRadius: 14 }}&gt;&#10;            &lt;Text style={{ fontSize: 24, fontWeight: 'bold', color: '#E8EEF7' }}&gt;毛病一 · 配置门槛高&lt;/Text&gt;&#10;            &lt;Text style={{ fontSize: 17, color: '#E8EEF7', opacity: 0.62, lineHeight: 1.5 }}&gt;想设一条「每周一三五下午三点半」，得先学会四套概念。&lt;/Text&gt;&#10;            &lt;svg width={648} height={214} viewBox='0 0 648 214'&gt;&#10;                &lt;rect x='0' y='10' width='150' height='54' rx='8' fill='rgba(232,238,247,0.06)' stroke='rgba(232,238,247,0.16)' /&gt;&#10;                &lt;rect x='0' y='80' width='150' height='54' rx='8' fill='rgba(232,238,247,0.06)' stroke='rgba(232,238,247,0.16)' /&gt;&#10;                &lt;rect x='0' y='150' width='150' height='54' rx='8' fill='rgba(232,238,247,0.06)' stroke='rgba(232,238,247,0.16)' /&gt;&#10;                &lt;rect x='182' y='10' width='150' height='54' rx='8' fill='rgba(232,238,247,0.06)' stroke='rgba(232,238,247,0.16)' /&gt;&#10;                &lt;rect x='182' y='80' width='150' height='54' rx='8' fill='rgba(232,238,247,0.06)' stroke='rgba(232,238,247,0.16)' /&gt;&#10;                &lt;rect x='182' y='150' width='150' height='54' rx='8' fill='rgba(232,238,247,0.06)' stroke='rgba(232,238,247,0.16)' /&gt;&#10;                &lt;path d='M364 107 L424 107' fill='none' stroke='#4FE0B0' strokeWidth='2' opacity='0.8' /&gt;&#10;                &lt;path d='M424 107 L438 100 L438 114 Z' fill='#4FE0B0' /&gt;&#10;                &lt;rect x='452' y='80' width='196' height='54' rx='8' fill='rgba(79,224,176,0.12)' stroke='#4FE0B0' /&gt;&#10;                &lt;circle cx='478' cy='107' r='6' fill='#4FE0B0' /&gt;&#10;                &lt;rect x='0' y='10' width='0' height='0' fill='none' /&gt;&#10;            &lt;/svg&gt;&#10;            &lt;Box style={{ marginTop: 'auto', padding: '14px 18px', background: 'rgba(79,224,176,0.10)', borderRadius: 10 }}&gt;&#10;                &lt;Text style={{ fontSize: 16, color: '#E8EEF7', opacity: 0.85, lineHeight: 1.5 }}&gt;门槛不在按钮多少，而在&quot;单次 / 每天 / 每周 / 每月&quot;这套概念本身——用户要先成为半个日程软件专家。&lt;/Text&gt;&#10;            &lt;/Box&gt;&#10;        &lt;/Box&gt;&#10;        &lt;Box style={{ flex: 1, flexDirection: 'column', gap: 16, padding: 26, background: 'rgba(232,238,247,0.04)', border: '1px solid rgba(232,238,247,0.10)', borderRadius: 14 }}&gt;&#10;            &lt;Text style={{ fontSize: 24, fontWeight: 'bold', color: '#E8EEF7' }}&gt;毛病二 · 提醒机械&lt;/Text&gt;&#10;            &lt;Text style={{ fontSize: 17, color: '#E8EEF7', opacity: 0.62, lineHeight: 1.5 }}&gt;固定文案反复弹出，几轮之后被大脑自动过滤。&lt;/Text&gt;&#10;            &lt;svg width={376} height={214} viewBox='0 0 376 214'&gt;&#10;                &lt;rect x='0' y='14' width='376' height='40' rx='8' fill='rgba(232,238,247,0.08)' stroke='rgba(232,238,247,0.18)' /&gt;&#10;                &lt;rect x='0' y='66' width='376' height='40' rx='8' fill='rgba(232,238,247,0.06)' stroke='rgba(232,238,247,0.14)' opacity='0.85' /&gt;&#10;                &lt;rect x='0' y='118' width='376' height='40' rx='8' fill='rgba(232,238,247,0.04)' stroke='rgba(232,238,247,0.10)' opacity='0.6' /&gt;&#10;                &lt;rect x='0' y='170' width='376' height='40' rx='8' fill='rgba(232,238,247,0.02)' stroke='rgba(232,238,247,0.07)' opacity='0.4' /&gt;&#10;                &lt;path d='M300 34 L344 34' fill='none' stroke='#4FE0B0' strokeWidth='2' opacity='0.7' /&gt;&#10;                &lt;path d='M300 86 L320 86' fill='none' stroke='#4FE0B0' strokeWidth='2' opacity='0.35' /&gt;&#10;                &lt;path d='M300 138 L308 138' fill='none' stroke='#4FE0B0' strokeWidth='2' opacity='0.18' /&gt;&#10;            &lt;/svg&gt;&#10;            &lt;Box style={{ marginTop: 'auto', padding: '14px 18px', background: 'rgba(79,224,176,0.10)', borderRadius: 10 }}&gt;&#10;                &lt;Text style={{ fontSize: 16, color: '#E8EEF7', opacity: 0.85, lineHeight: 1.5 }}&gt;提醒的强度随重复次数递减——第三次之后，它和桌面壁纸没有区别。&lt;/Text&gt;&#10;            &lt;/Box&gt;&#10;        &lt;/Box&gt;&#10;    &lt;/Box&gt;&#10;    &lt;Box style={{ height: 60, flexDirection: 'row', alignItems: 'center', justifyContent: 'space-between' }}&gt;&#10;        &lt;Text style={{ fontSize: 14, color: '#E8EEF7', opacity: 0.42 }}&gt;知歇 ZhiXie · V1.0.0&lt;/Text&gt;&#10;        &lt;Text style={{ fontSize: 14, fontFamily: 'Consolas', color: '#E8EEF7', opacity: 0.42 }}&gt;04 / 18&lt;/Text&gt;&#10;    &lt;/Box&gt;&#10;&lt;/Slide&gt;&#10;"/>
+        <p:cNvPr id="257" name=""/>
         <p:cNvGrpSpPr/>
         <p:nvPr/>
       </p:nvGrpSpPr>
@@ -12609,7 +12634,10 @@
         </p:spPr>
         <p:txBody>
           <a:bodyPr/>
-          <a:p/>
+          <a:p>
+            <a:pPr/>
+            <a:endParaRPr/>
+          </a:p>
         </p:txBody>
       </p:sp>
       <p:sp>
@@ -12679,7 +12707,10 @@
         </p:spPr>
         <p:txBody>
           <a:bodyPr/>
-          <a:p/>
+          <a:p>
+            <a:pPr/>
+            <a:endParaRPr/>
+          </a:p>
         </p:txBody>
       </p:sp>
       <p:sp>
@@ -12793,7 +12824,10 @@
         </p:spPr>
         <p:txBody>
           <a:bodyPr/>
-          <a:p/>
+          <a:p>
+            <a:pPr/>
+            <a:endParaRPr/>
+          </a:p>
         </p:txBody>
       </p:sp>
       <p:sp>
@@ -12828,7 +12862,10 @@
         </p:spPr>
         <p:txBody>
           <a:bodyPr/>
-          <a:p/>
+          <a:p>
+            <a:pPr/>
+            <a:endParaRPr/>
+          </a:p>
         </p:txBody>
       </p:sp>
       <p:sp>
@@ -12942,7 +12979,10 @@
         </p:spPr>
         <p:txBody>
           <a:bodyPr/>
-          <a:p/>
+          <a:p>
+            <a:pPr/>
+            <a:endParaRPr/>
+          </a:p>
         </p:txBody>
       </p:sp>
       <p:sp>
@@ -13387,7 +13427,7 @@
   <p:cSld>
     <p:spTree>
       <p:nvGrpSpPr>
-        <p:cNvPr id="276" name="" descr="&lt;Slide style={{ width: 1280, height: 720, background: '#0B1220', padding: '20px 64px' }}&gt;&#10;    &lt;Box style={{ height: 100, flexDirection: 'row', alignItems: 'flex-end', justifyContent: 'space-between', paddingBottom: 18 }}&gt;&#10;        &lt;Box style={{ flexDirection: 'column', gap: 6 }}&gt;&#10;            &lt;Text style={{ fontSize: 36, fontWeight: 'bold', color: '#E8EEF7' }}&gt;知歇是什么&lt;/Text&gt;&#10;            &lt;Text style={{ fontSize: 16, color: '#E8EEF7', opacity: 0.55, letterSpacing: 1 }}&gt;一句话定义，三个关键词&lt;/Text&gt;&#10;        &lt;/Box&gt;&#10;        &lt;Text style={{ fontSize: 14, fontFamily: 'Consolas', color: '#E8EEF7', opacity: 0.35 }}&gt;05&lt;/Text&gt;&#10;    &lt;/Box&gt;&#10;    &lt;Box style={{ height: 500, flexDirection: 'row', gap: 40, alignItems: 'center' }}&gt;&#10;        &lt;Box style={{ width: 610, height: 460, justifyContent: 'center', alignItems: 'center', background: 'rgba(232,238,247,0.03)', border: '1px solid rgba(232,238,247,0.10)', borderRadius: 14 }}&gt;&#10;            &lt;svg width={560} height={400} viewBox='0 0 560 400'&gt;&#10;                &lt;rect x='20' y='20' width='520' height='196' rx='12' fill='rgba(232,238,247,0.05)' stroke='rgba(232,238,247,0.16)' /&gt;&#10;                &lt;rect x='40' y='42' width='120' height='12' rx='6' fill='#4FE0B0' opacity='0.85' /&gt;&#10;                &lt;rect x='176' y='42' width='60' height='12' rx='6' fill='rgba(232,238,247,0.22)' /&gt;&#10;                &lt;rect x='40' y='78' width='480' height='1' fill='rgba(232,238,247,0.14)' /&gt;&#10;                &lt;rect x='40' y='102' width='220' height='16' rx='8' fill='rgba(232,238,247,0.30)' /&gt;&#10;                &lt;rect x='40' y='132' width='160' height='16' rx='8' fill='rgba(232,238,247,0.18)' /&gt;&#10;                &lt;rect x='40' y='170' width='130' height='30' rx='15' fill='rgba(79,224,176,0.20)' stroke='#4FE0B0' /&gt;&#10;                &lt;rect x='436' y='98' width='84' height='84' rx='10' fill='rgba(79,224,176,0.12)' stroke='rgba(79,224,176,0.55)' /&gt;&#10;                &lt;path d='M462 140 L482 128 L482 152 Z' fill='#4FE0B0' opacity='0.9' /&gt;&#10;                &lt;rect x='90' y='250' width='380' height='130' rx='12' fill='rgba(11,18,32,0.75)' stroke='#4FE0B0' /&gt;&#10;                &lt;rect x='150' y='284' width='260' height='14' rx='7' fill='rgba(232,238,247,0.75)' /&gt;&#10;                &lt;rect x='190' y='316' width='180' height='12' rx='6' fill='rgba(79,224,176,0.85)' /&gt;&#10;                &lt;rect x='170' y='348' width='220' height='16' rx='8' fill='rgba(232,238,247,0.20)' /&gt;&#10;                &lt;path d='M280 216 L280 246' fill='none' stroke='#4FE0B0' strokeWidth='2' opacity='0.7' /&gt;&#10;            &lt;/svg&gt;&#10;        &lt;/Box&gt;&#10;        &lt;Box style={{ flex: 1, flexDirection: 'column', gap: 18 }}&gt;&#10;            &lt;Text style={{ fontSize: 22, color: '#E8EEF7', opacity: 0.85, lineHeight: 1.6 }}&gt;一款融合智能体的桌面休息提醒工具：说一句话，智能体把它变成可执行的提醒规则，到点用全屏弹窗把你从屏幕前拉开。&lt;/Text&gt;&#10;            &lt;Box style={{ flexDirection: 'row', gap: 14, alignItems: 'center' }}&gt;&#10;                &lt;svg width={34} height={34} viewBox='0 0 34 34'&gt;&#10;                    &lt;circle cx='17' cy='17' r='15' fill='none' stroke='#4FE0B0' strokeWidth='1.5' /&gt;&#10;                    &lt;path d='M10 17 L15 22 L24 12' fill='none' stroke='#4FE0B0' strokeWidth='2.5' /&gt;&#10;                &lt;/svg&gt;&#10;                &lt;Text style={{ fontSize: 20, color: '#E8EEF7', lineHeight: 1.5 }}&gt;一句话生成提醒规则&lt;/Text&gt;&#10;            &lt;/Box&gt;&#10;            &lt;Box style={{ flexDirection: 'row', gap: 14, alignItems: 'center' }}&gt;&#10;                &lt;svg width={34} height={34} viewBox='0 0 34 34'&gt;&#10;                    &lt;circle cx='17' cy='17' r='15' fill='none' stroke='#4FE0B0' strokeWidth='1.5' /&gt;&#10;                    &lt;path d='M10 17 L15 22 L24 12' fill='none' stroke='#4FE0B0' strokeWidth='2.5' /&gt;&#10;                &lt;/svg&gt;&#10;                &lt;Text style={{ fontSize: 20, color: '#E8EEF7', lineHeight: 1.5 }}&gt;云端 + 本机双通道，断网也能用&lt;/Text&gt;&#10;            &lt;/Box&gt;&#10;            &lt;Box style={{ flexDirection: 'row', gap: 14, alignItems: 'center' }}&gt;&#10;                &lt;svg width={34} height={34} viewBox='0 0 34 34'&gt;&#10;                    &lt;circle cx='17' cy='17' r='15' fill='none' stroke='#4FE0B0' strokeWidth='1.5' /&gt;&#10;                    &lt;path d='M10 17 L15 22 L24 12' fill='none' stroke='#4FE0B0' strokeWidth='2.5' /&gt;&#10;                &lt;/svg&gt;&#10;                &lt;Text style={{ fontSize: 20, color: '#E8EEF7', lineHeight: 1.5 }}&gt;数据全在本机，零账号、零采集&lt;/Text&gt;&#10;            &lt;/Box&gt;&#10;            &lt;Box style={{ marginTop: 8, paddingTop: 18, borderTop: '1px solid rgba(232,238,247,0.12)' }}&gt;&#10;                &lt;Text style={{ fontSize: 15, fontFamily: 'Consolas', color: '#4FE0B0', letterSpacing: 1 }}&gt;Windows x64 / ARM64 · Apple Silicon macOS · Tauri 2 + Vue 3 + Rust&lt;/Text&gt;&#10;            &lt;/Box&gt;&#10;        &lt;/Box&gt;&#10;    &lt;/Box&gt;&#10;    &lt;Box style={{ height: 60, flexDirection: 'row', alignItems: 'center', justifyContent: 'space-between' }}&gt;&#10;        &lt;Text style={{ fontSize: 14, color: '#E8EEF7', opacity: 0.42 }}&gt;知歇 ZhiXie · V1.0.0&lt;/Text&gt;&#10;        &lt;Text style={{ fontSize: 14, fontFamily: 'Consolas', color: '#E8EEF7', opacity: 0.42 }}&gt;05 / 18&lt;/Text&gt;&#10;    &lt;/Box&gt;&#10;&lt;/Slide&gt;&#10;"/>
+        <p:cNvPr id="276" name=""/>
         <p:cNvGrpSpPr/>
         <p:nvPr/>
       </p:nvGrpSpPr>
@@ -13420,7 +13460,10 @@
         </p:spPr>
         <p:txBody>
           <a:bodyPr/>
-          <a:p/>
+          <a:p>
+            <a:pPr/>
+            <a:endParaRPr/>
+          </a:p>
         </p:txBody>
       </p:sp>
       <p:sp>
@@ -13490,7 +13533,10 @@
         </p:spPr>
         <p:txBody>
           <a:bodyPr/>
-          <a:p/>
+          <a:p>
+            <a:pPr/>
+            <a:endParaRPr/>
+          </a:p>
         </p:txBody>
       </p:sp>
       <p:pic>
@@ -13781,7 +13827,10 @@
         </p:spPr>
         <p:txBody>
           <a:bodyPr/>
-          <a:p/>
+          <a:p>
+            <a:pPr/>
+            <a:endParaRPr/>
+          </a:p>
         </p:txBody>
       </p:sp>
       <p:sp>
@@ -14030,7 +14079,7 @@
   <p:cSld>
     <p:spTree>
       <p:nvGrpSpPr>
-        <p:cNvPr id="294" name="" descr="&lt;Slide style={{ width: 1280, height: 720, background: '#0B1220', padding: '20px 64px' }}&gt;&#10;    &lt;Box style={{ height: 600, flexDirection: 'row', alignItems: 'center', gap: 64 }}&gt;&#10;        &lt;Text style={{ fontSize: 230, fontWeight: 'bold', fontFamily: 'Consolas', color: '#4FE0B0', opacity: 0.15, lineHeight: 1 }}&gt;02&lt;/Text&gt;&#10;        &lt;Box style={{ flexDirection: 'column', gap: 20, width: 540 }}&gt;&#10;            &lt;Text style={{ fontSize: 60, fontWeight: 'bold', color: '#E8EEF7', lineHeight: 1.15 }}&gt;智能体开发过程&lt;/Text&gt;&#10;            &lt;Box style={{ height: 4, width: 110, background: 'linear-gradient(135deg, #4FE0B0 0%, #2E9E8F 100%)', borderRadius: 2 }} /&gt;&#10;            &lt;Text style={{ fontSize: 20, color: '#E8EEF7', opacity: 0.72, lineHeight: 1.65 }}&gt;本赛道最关心的一章。智能体在知歇里不是&quot;加了个对话框&quot;，而是&lt;br /&gt;同时承担规则生成、休息建议与文案生成三件事。&lt;/Text&gt;&#10;            &lt;Text style={{ fontSize: 15, fontFamily: 'Consolas', color: '#4FE0B0', letterSpacing: 2 }}&gt;P06 – P10&lt;/Text&gt;&#10;        &lt;/Box&gt;&#10;    &lt;/Box&gt;&#10;    &lt;Box style={{ height: 60, flexDirection: 'row', alignItems: 'center', justifyContent: 'space-between' }}&gt;&#10;        &lt;Text style={{ fontSize: 14, color: '#E8EEF7', opacity: 0.42 }}&gt;知歇 ZhiXie · V1.0.0&lt;/Text&gt;&#10;        &lt;Text style={{ fontSize: 14, fontFamily: 'Consolas', color: '#E8EEF7', opacity: 0.42 }}&gt;06 / 18&lt;/Text&gt;&#10;    &lt;/Box&gt;&#10;&lt;/Slide&gt;&#10;"/>
+        <p:cNvPr id="294" name=""/>
         <p:cNvGrpSpPr/>
         <p:nvPr/>
       </p:nvGrpSpPr>
@@ -14063,7 +14112,10 @@
         </p:spPr>
         <p:txBody>
           <a:bodyPr/>
-          <a:p/>
+          <a:p>
+            <a:pPr/>
+            <a:endParaRPr/>
+          </a:p>
         </p:txBody>
       </p:sp>
       <p:sp>
@@ -14132,7 +14184,10 @@
         </p:spPr>
         <p:txBody>
           <a:bodyPr/>
-          <a:p/>
+          <a:p>
+            <a:pPr/>
+            <a:endParaRPr/>
+          </a:p>
         </p:txBody>
       </p:sp>
       <p:sp>
@@ -14410,7 +14465,7 @@
   <p:cSld>
     <p:spTree>
       <p:nvGrpSpPr>
-        <p:cNvPr id="303" name="" descr="&lt;Slide style={{ width: 1280, height: 720, background: '#0B1220', padding: '20px 64px' }}&gt;&#10;    &lt;Box style={{ height: 100, flexDirection: 'row', alignItems: 'flex-end', justifyContent: 'space-between', paddingBottom: 18 }}&gt;&#10;        &lt;Box style={{ flexDirection: 'column', gap: 6 }}&gt;&#10;            &lt;Text style={{ fontSize: 36, fontWeight: 'bold', color: '#E8EEF7' }}&gt;双通道架构&lt;/Text&gt;&#10;            &lt;Text style={{ fontSize: 16, color: '#E8EEF7', opacity: 0.55, letterSpacing: 1 }}&gt;云端提升上限，本机保底可用，校验优先落库&lt;/Text&gt;&#10;        &lt;/Box&gt;&#10;        &lt;Text style={{ fontSize: 14, fontFamily: 'Consolas', color: '#4FE0B0', opacity: 0.8 }}&gt;核心架构&lt;/Text&gt;&#10;    &lt;/Box&gt;&#10;    &lt;Box style={{ height: 500, flexDirection: 'column', gap: 16 }}&gt;&#10;        &lt;Box style={{ alignItems: 'center' }}&gt;&#10;            &lt;Box style={{ width: 980, height: 58, justifyContent: 'center', alignItems: 'center', background: 'rgba(232,238,247,0.06)', border: '1px solid rgba(232,238,247,0.18)', borderRadius: 10 }}&gt;&#10;                &lt;Text style={{ fontSize: 17, color: '#E8EEF7' }}&gt;用户自然语言输入　「每周一三五下午三点半提醒我起来活动，顺便锁屏」&lt;/Text&gt;&#10;            &lt;/Box&gt;&#10;        &lt;/Box&gt;&#10;        &lt;svg width={980} height={28} viewBox='0 0 980 28'&gt;&#10;            &lt;path d='M490 0 L490 12' fill='none' stroke='#4FE0B0' strokeWidth='2' opacity='0.75' /&gt;&#10;            &lt;path d='M245 12 L735 12' fill='none' stroke='#4FE0B0' strokeWidth='2' opacity='0.75' /&gt;&#10;            &lt;path d='M245 12 L245 26' fill='none' stroke='#4FE0B0' strokeWidth='2' opacity='0.75' /&gt;&#10;            &lt;path d='M735 12 L735 26' fill='none' stroke='#4FE0B0' strokeWidth='2' opacity='0.75' /&gt;&#10;            &lt;path d='M239 20 L245 28 L251 20 Z' fill='#4FE0B0' opacity='0.9' /&gt;&#10;            &lt;path d='M729 20 L735 28 L741 20 Z' fill='#4FE0B0' opacity='0.9' /&gt;&#10;        &lt;/svg&gt;&#10;        &lt;Box style={{ flexDirection: 'row', gap: 32 }}&gt;&#10;            &lt;Box style={{ flex: 1, height: 108, flexDirection: 'column', gap: 8, padding: '16px 20px', background: 'rgba(79,224,176,0.08)', border: '1px solid rgba(79,224,176,0.45)', borderRadius: 12 }}&gt;&#10;                &lt;Box style={{ flexDirection: 'row', alignItems: 'center', justifyContent: 'space-between' }}&gt;&#10;                    &lt;Text style={{ fontSize: 20, fontWeight: 'bold', color: '#E8EEF7' }}&gt;云端大模型通道&lt;/Text&gt;&#10;                    &lt;Text style={{ fontSize: 13, fontFamily: 'Consolas', color: '#4FE0B0' }}&gt;可选 · 需用户主动开启&lt;/Text&gt;&#10;                &lt;/Box&gt;&#10;                &lt;Text style={{ fontSize: 15, color: '#E8EEF7', opacity: 0.7, lineHeight: 1.5 }}&gt;OpenAI 兼容接口（默认 DeepSeek）· 系统提示词约束输出固定字段 · temperature 0.2 · 40 秒超时保护&lt;/Text&gt;&#10;            &lt;/Box&gt;&#10;            &lt;Box style={{ flex: 1, height: 108, flexDirection: 'column', gap: 8, padding: '16px 20px', background: 'rgba(79,224,176,0.08)', border: '1px solid rgba(79,224,176,0.45)', borderRadius: 12 }}&gt;&#10;                &lt;Box style={{ flexDirection: 'row', alignItems: 'center', justifyContent: 'space-between' }}&gt;&#10;                    &lt;Text style={{ fontSize: 20, fontWeight: 'bold', color: '#E8EEF7' }}&gt;本机规则引擎&lt;/Text&gt;&#10;                    &lt;Text style={{ fontSize: 13, fontFamily: 'Consolas', color: '#4FE0B0' }}&gt;默认 · 离线可用&lt;/Text&gt;&#10;                &lt;/Box&gt;&#10;                &lt;Text style={{ fontSize: 15, color: '#E8EEF7', opacity: 0.7, lineHeight: 1.5 }}&gt;纯 Rust 实现，零外部依赖；未配置密钥 / 断网 / 接口报错时自动接手，功能不中断&lt;/Text&gt;&#10;            &lt;/Box&gt;&#10;        &lt;/Box&gt;&#10;        &lt;svg width={980} height={28} viewBox='0 0 980 28'&gt;&#10;            &lt;path d='M245 0 L245 14' fill='none' stroke='#4FE0B0' strokeWidth='2' opacity='0.75' /&gt;&#10;            &lt;path d='M735 0 L735 14' fill='none' stroke='#4FE0B0' strokeWidth='2' opacity='0.75' /&gt;&#10;            &lt;path d='M245 14 L735 14' fill='none' stroke='#4FE0B0' strokeWidth='2' opacity='0.75' /&gt;&#10;            &lt;path d='M490 14 L490 26' fill='none' stroke='#4FE0B0' strokeWidth='2' opacity='0.75' /&gt;&#10;            &lt;path d='M484 20 L490 28 L496 20 Z' fill='#4FE0B0' opacity='0.9' /&gt;&#10;        &lt;/svg&gt;&#10;        &lt;Box style={{ alignItems: 'center' }}&gt;&#10;            &lt;Box style={{ width: 980, height: 62, flexDirection: 'row', justifyContent: 'center', alignItems: 'center', gap: 16, background: 'rgba(79,224,176,0.12)', border: '1px solid #4FE0B0', borderRadius: 10 }}&gt;&#10;                &lt;Text style={{ fontSize: 19, fontWeight: 'bold', color: '#E8EEF7' }}&gt;统一字段校验层&lt;/Text&gt;&#10;                &lt;Text style={{ fontSize: 16, color: '#E8EEF7', opacity: 0.7 }}&gt;→　合法字段写入提醒数据；非法字段被过滤或回落默认值&lt;/Text&gt;&#10;            &lt;/Box&gt;&#10;        &lt;/Box&gt;&#10;        &lt;Box style={{ flex: 1, flexDirection: 'row', gap: 20 }}&gt;&#10;            &lt;Box style={{ flex: 1, flexDirection: 'column', gap: 6, padding: 14, background: 'rgba(232,238,247,0.04)', border: '1px solid rgba(232,238,247,0.10)', borderRadius: 10 }}&gt;&#10;                &lt;Text style={{ fontSize: 18, fontWeight: 'bold', color: '#4FE0B0' }}&gt;云端提升上限&lt;/Text&gt;&#10;                &lt;Text style={{ fontSize: 14, color: '#E8EEF7', opacity: 0.68, lineHeight: 1.5 }}&gt;更自由的表达方式交给大模型理解，用户不必迁就关键词模板。&lt;/Text&gt;&#10;            &lt;/Box&gt;&#10;            &lt;Box style={{ flex: 1, flexDirection: 'column', gap: 6, padding: 14, background: 'rgba(232,238,247,0.04)', border: '1px solid rgba(232,238,247,0.10)', borderRadius: 10 }}&gt;&#10;                &lt;Text style={{ fontSize: 18, fontWeight: 'bold', color: '#4FE0B0' }}&gt;本机保底可用&lt;/Text&gt;&#10;                &lt;Text style={{ fontSize: 14, color: '#E8EEF7', opacity: 0.68, lineHeight: 1.5 }}&gt;断网、未配置、接口报错都不影响使用——网络是可选增强，不是必要依赖。&lt;/Text&gt;&#10;            &lt;/Box&gt;&#10;            &lt;Box style={{ flex: 1, flexDirection: 'column', gap: 6, padding: 14, background: 'rgba(232,238,247,0.04)', border: '1px solid rgba(232,238,247,0.10)', borderRadius: 10 }}&gt;&#10;                &lt;Text style={{ fontSize: 18, fontWeight: 'bold', color: '#4FE0B0' }}&gt;校验优先落库&lt;/Text&gt;&#10;                &lt;Text style={{ fontSize: 14, color: '#E8EEF7', opacity: 0.68, lineHeight: 1.5 }}&gt;模型只负责提出建议，能否写入由系统判定，幻觉不会污染用户数据。&lt;/Text&gt;&#10;            &lt;/Box&gt;&#10;        &lt;/Box&gt;&#10;    &lt;/Box&gt;&#10;    &lt;Box style={{ height: 60, flexDirection: 'row', alignItems: 'center', justifyContent: 'space-between' }}&gt;&#10;        &lt;Text style={{ fontSize: 14, color: '#E8EEF7', opacity: 0.42 }}&gt;知歇 ZhiXie · V1.0.0&lt;/Text&gt;&#10;        &lt;Text style={{ fontSize: 14, fontFamily: 'Consolas', color: '#E8EEF7', opacity: 0.42 }}&gt;07 / 18&lt;/Text&gt;&#10;    &lt;/Box&gt;&#10;&lt;/Slide&gt;&#10;"/>
+        <p:cNvPr id="303" name=""/>
         <p:cNvGrpSpPr/>
         <p:nvPr/>
       </p:nvGrpSpPr>
@@ -14443,7 +14498,10 @@
         </p:spPr>
         <p:txBody>
           <a:bodyPr/>
-          <a:p/>
+          <a:p>
+            <a:pPr/>
+            <a:endParaRPr/>
+          </a:p>
         </p:txBody>
       </p:sp>
       <p:sp>
@@ -14513,7 +14571,10 @@
         </p:spPr>
         <p:txBody>
           <a:bodyPr/>
-          <a:p/>
+          <a:p>
+            <a:pPr/>
+            <a:endParaRPr/>
+          </a:p>
         </p:txBody>
       </p:sp>
       <p:sp>
@@ -14614,7 +14675,10 @@
         </p:spPr>
         <p:txBody>
           <a:bodyPr/>
-          <a:p/>
+          <a:p>
+            <a:pPr/>
+            <a:endParaRPr/>
+          </a:p>
         </p:txBody>
       </p:sp>
       <p:sp>
@@ -14739,7 +14803,10 @@
         </p:spPr>
         <p:txBody>
           <a:bodyPr/>
-          <a:p/>
+          <a:p>
+            <a:pPr/>
+            <a:endParaRPr/>
+          </a:p>
         </p:txBody>
       </p:sp>
       <p:sp>
@@ -14893,7 +14960,10 @@
         </p:spPr>
         <p:txBody>
           <a:bodyPr/>
-          <a:p/>
+          <a:p>
+            <a:pPr/>
+            <a:endParaRPr/>
+          </a:p>
         </p:txBody>
       </p:sp>
       <p:sp>
@@ -14963,7 +15033,10 @@
         </p:spPr>
         <p:txBody>
           <a:bodyPr/>
-          <a:p/>
+          <a:p>
+            <a:pPr/>
+            <a:endParaRPr/>
+          </a:p>
         </p:txBody>
       </p:sp>
       <p:sp>
@@ -15033,7 +15106,10 @@
         </p:spPr>
         <p:txBody>
           <a:bodyPr/>
-          <a:p/>
+          <a:p>
+            <a:pPr/>
+            <a:endParaRPr/>
+          </a:p>
         </p:txBody>
       </p:sp>
       <p:sp>
@@ -15103,7 +15179,10 @@
         </p:spPr>
         <p:txBody>
           <a:bodyPr/>
-          <a:p/>
+          <a:p>
+            <a:pPr/>
+            <a:endParaRPr/>
+          </a:p>
         </p:txBody>
       </p:sp>
       <p:sp>
@@ -15699,7 +15778,7 @@
   <p:cSld>
     <p:spTree>
       <p:nvGrpSpPr>
-        <p:cNvPr id="334" name="" descr="&lt;Slide style={{ width: 1280, height: 720, background: '#0B1220', padding: '20px 64px' }}&gt;&#10;    &lt;Box style={{ height: 100, flexDirection: 'row', alignItems: 'flex-end', justifyContent: 'space-between', paddingBottom: 18 }}&gt;&#10;        &lt;Box style={{ flexDirection: 'column', gap: 6 }}&gt;&#10;            &lt;Text style={{ fontSize: 36, fontWeight: 'bold', color: '#E8EEF7' }}&gt;本机规则引擎：断网也能听懂你&lt;/Text&gt;&#10;            &lt;Text style={{ fontSize: 16, color: '#E8EEF7', opacity: 0.55, letterSpacing: 1 }}&gt;面向中文口语表达优化的五类高频句式&lt;/Text&gt;&#10;        &lt;/Box&gt;&#10;        &lt;Text style={{ fontSize: 14, fontFamily: 'Consolas', color: '#E8EEF7', opacity: 0.35 }}&gt;08&lt;/Text&gt;&#10;    &lt;/Box&gt;&#10;    &lt;Box style={{ height: 500, flexDirection: 'row', gap: 32 }}&gt;&#10;        &lt;Box style={{ width: 340, flexDirection: 'column', justifyContent: 'space-between', padding: 24, background: 'rgba(79,224,176,0.08)', border: '1px solid rgba(79,224,176,0.35)', borderRadius: 14 }}&gt;&#10;            &lt;Box style={{ flexDirection: 'column', gap: 14 }}&gt;&#10;                &lt;Text style={{ fontSize: 24, fontWeight: 'bold', color: '#E8EEF7', lineHeight: 1.35 }}&gt;纯 Rust 实现&lt;br /&gt;零外部依赖&lt;/Text&gt;&#10;                &lt;Box style={{ height: 3, width: 80, background: 'linear-gradient(135deg, #4FE0B0 0%, #2E9E8F 100%)', borderRadius: 2 }} /&gt;&#10;                &lt;Text style={{ fontSize: 16, color: '#E8EEF7', opacity: 0.72, lineHeight: 1.6 }}&gt;不联网、不需要账号、不产生接口费用。未配置密钥时即为默认工作模式，安装完就能用。&lt;/Text&gt;&#10;            &lt;/Box&gt;&#10;            &lt;Box style={{ flexDirection: 'column', gap: 8, paddingTop: 16, borderTop: '1px solid rgba(232,238,247,0.14)' }}&gt;&#10;                &lt;Text style={{ fontSize: 15, color: '#E8EEF7', opacity: 0.6, lineHeight: 1.5 }}&gt;无关键词的句子会回落为「单次提醒」，并保留原句作为标题——不报错、不丢输入。&lt;/Text&gt;&#10;            &lt;/Box&gt;&#10;        &lt;/Box&gt;&#10;        &lt;Box style={{ flex: 1, flexDirection: 'column', gap: 12 }}&gt;&#10;            &lt;Box style={{ flexDirection: 'row', alignItems: 'center', paddingBottom: 8, borderBottom: '1px solid rgba(232,238,247,0.14)' }}&gt;&#10;                &lt;Text style={{ width: 420, fontSize: 14, color: '#E8EEF7', opacity: 0.5, letterSpacing: 1 }}&gt;你说的（自然表达）&lt;/Text&gt;&#10;                &lt;Text style={{ flex: 1, fontSize: 14, color: '#E8EEF7', opacity: 0.5, letterSpacing: 1 }}&gt;智能体解析出的（结构化规则）&lt;/Text&gt;&#10;            &lt;/Box&gt;&#10;            &lt;Box style={{ height: 78, flexDirection: 'row', alignItems: 'center', padding: '0 18px', background: 'rgba(232,238,247,0.04)', border: '1px solid rgba(232,238,247,0.10)', borderRadius: 10 }}&gt;&#10;                &lt;Text style={{ width: 420, fontSize: 17, color: '#E8EEF7' }}&gt;「每天&lt;span style={{ color: '#4FE0B0' }}&gt;下午三点&lt;/span&gt;提醒我喝水」&lt;/Text&gt;&#10;                &lt;Text style={{ flex: 1, fontSize: 17, color: '#4FE0B0' }}&gt;每天 · 15:00 · 中文数字时间&lt;/Text&gt;&#10;            &lt;/Box&gt;&#10;            &lt;Box style={{ height: 78, flexDirection: 'row', alignItems: 'center', padding: '0 18px', background: 'rgba(232,238,247,0.04)', border: '1px solid rgba(232,238,247,0.10)', borderRadius: 10 }}&gt;&#10;                &lt;Text style={{ width: 420, fontSize: 17, color: '#E8EEF7' }}&gt;「&lt;span style={{ color: '#4FE0B0' }}&gt;30分钟后&lt;/span&gt;提醒我休息一下」&lt;/Text&gt;&#10;                &lt;Text style={{ flex: 1, fontSize: 17, color: '#4FE0B0' }}&gt;单次 · 当前时间 +30 分钟 · 相对时间&lt;/Text&gt;&#10;            &lt;/Box&gt;&#10;            &lt;Box style={{ height: 78, flexDirection: 'row', alignItems: 'center', padding: '0 18px', background: 'rgba(232,238,247,0.04)', border: '1px solid rgba(232,238,247,0.10)', borderRadius: 10 }}&gt;&#10;                &lt;Text style={{ width: 420, fontSize: 17, color: '#E8EEF7' }}&gt;「&lt;span style={{ color: '#4FE0B0' }}&gt;每周一三五&lt;/span&gt; 17:30 提醒我锁屏」&lt;/Text&gt;&#10;                &lt;Text style={{ flex: 1, fontSize: 17, color: '#4FE0B0' }}&gt;每周 · 周一 / 周三 / 周五 · 附加锁屏&lt;/Text&gt;&#10;            &lt;/Box&gt;&#10;            &lt;Box style={{ height: 78, flexDirection: 'row', alignItems: 'center', padding: '0 18px', background: 'rgba(232,238,247,0.04)', border: '1px solid rgba(232,238,247,0.10)', borderRadius: 10 }}&gt;&#10;                &lt;Text style={{ width: 420, fontSize: 17, color: '#E8EEF7' }}&gt;「&lt;span style={{ color: '#4FE0B0' }}&gt;明天&lt;/span&gt;早上八点提醒我交作业」&lt;/Text&gt;&#10;                &lt;Text style={{ flex: 1, fontSize: 17, color: '#4FE0B0' }}&gt;单次 · 次日 08:00 · 日期词&lt;/Text&gt;&#10;            &lt;/Box&gt;&#10;            &lt;Box style={{ height: 78, flexDirection: 'row', alignItems: 'center', padding: '0 18px', background: 'rgba(232,238,247,0.04)', border: '1px solid rgba(232,238,247,0.10)', borderRadius: 10 }}&gt;&#10;                &lt;Text style={{ width: 420, fontSize: 17, color: '#E8EEF7' }}&gt;「晚上十一点提醒我锁屏睡觉」&lt;/Text&gt;&#10;                &lt;Text style={{ flex: 1, fontSize: 17, color: '#4FE0B0' }}&gt;每天 · 23:00 · 系统操作词&lt;/Text&gt;&#10;            &lt;/Box&gt;&#10;        &lt;/Box&gt;&#10;    &lt;/Box&gt;&#10;    &lt;Box style={{ height: 60, flexDirection: 'row', alignItems: 'center', justifyContent: 'space-between' }}&gt;&#10;        &lt;Text style={{ fontSize: 14, color: '#E8EEF7', opacity: 0.42 }}&gt;知歇 ZhiXie · V1.0.0&lt;/Text&gt;&#10;        &lt;Text style={{ fontSize: 14, fontFamily: 'Consolas', color: '#E8EEF7', opacity: 0.42 }}&gt;08 / 18&lt;/Text&gt;&#10;    &lt;/Box&gt;&#10;&lt;/Slide&gt;&#10;"/>
+        <p:cNvPr id="334" name=""/>
         <p:cNvGrpSpPr/>
         <p:nvPr/>
       </p:nvGrpSpPr>
@@ -15732,7 +15811,10 @@
         </p:spPr>
         <p:txBody>
           <a:bodyPr/>
-          <a:p/>
+          <a:p>
+            <a:pPr/>
+            <a:endParaRPr/>
+          </a:p>
         </p:txBody>
       </p:sp>
       <p:sp>
@@ -15802,7 +15884,10 @@
         </p:spPr>
         <p:txBody>
           <a:bodyPr/>
-          <a:p/>
+          <a:p>
+            <a:pPr/>
+            <a:endParaRPr/>
+          </a:p>
         </p:txBody>
       </p:sp>
       <p:sp>
@@ -15909,7 +15994,10 @@
         </p:spPr>
         <p:txBody>
           <a:bodyPr/>
-          <a:p/>
+          <a:p>
+            <a:pPr/>
+            <a:endParaRPr/>
+          </a:p>
         </p:txBody>
       </p:sp>
       <p:sp>
@@ -15951,7 +16039,10 @@
         </p:spPr>
         <p:txBody>
           <a:bodyPr/>
-          <a:p/>
+          <a:p>
+            <a:pPr/>
+            <a:endParaRPr/>
+          </a:p>
         </p:txBody>
       </p:sp>
       <p:sp>
@@ -15993,7 +16084,10 @@
         </p:spPr>
         <p:txBody>
           <a:bodyPr/>
-          <a:p/>
+          <a:p>
+            <a:pPr/>
+            <a:endParaRPr/>
+          </a:p>
         </p:txBody>
       </p:sp>
       <p:sp>
@@ -16028,7 +16122,10 @@
         </p:spPr>
         <p:txBody>
           <a:bodyPr/>
-          <a:p/>
+          <a:p>
+            <a:pPr/>
+            <a:endParaRPr/>
+          </a:p>
         </p:txBody>
       </p:sp>
       <p:sp>
@@ -16173,7 +16270,10 @@
         </p:spPr>
         <p:txBody>
           <a:bodyPr/>
-          <a:p/>
+          <a:p>
+            <a:pPr/>
+            <a:endParaRPr/>
+          </a:p>
         </p:txBody>
       </p:sp>
       <p:sp>
@@ -16368,7 +16468,10 @@
         </p:spPr>
         <p:txBody>
           <a:bodyPr/>
-          <a:p/>
+          <a:p>
+            <a:pPr/>
+            <a:endParaRPr/>
+          </a:p>
         </p:txBody>
       </p:sp>
       <p:sp>
@@ -16583,7 +16686,10 @@
         </p:spPr>
         <p:txBody>
           <a:bodyPr/>
-          <a:p/>
+          <a:p>
+            <a:pPr/>
+            <a:endParaRPr/>
+          </a:p>
         </p:txBody>
       </p:sp>
       <p:sp>
@@ -16748,7 +16854,10 @@
         </p:spPr>
         <p:txBody>
           <a:bodyPr/>
-          <a:p/>
+          <a:p>
+            <a:pPr/>
+            <a:endParaRPr/>
+          </a:p>
         </p:txBody>
       </p:sp>
       <p:sp>
@@ -17163,7 +17272,7 @@
   <p:cSld>
     <p:spTree>
       <p:nvGrpSpPr>
-        <p:cNvPr id="365" name="" descr="&lt;Slide style={{ width: 1280, height: 720, background: '#0B1220', padding: '20px 64px' }}&gt;&#10;    &lt;Box style={{ height: 100, flexDirection: 'row', alignItems: 'flex-end', justifyContent: 'space-between', paddingBottom: 18 }}&gt;&#10;        &lt;Box style={{ flexDirection: 'column', gap: 6 }}&gt;&#10;            &lt;Text style={{ fontSize: 36, fontWeight: 'bold', color: '#E8EEF7' }}&gt;模型提建议，系统说了算&lt;/Text&gt;&#10;            &lt;Text style={{ fontSize: 16, color: '#E8EEF7', opacity: 0.55, letterSpacing: 1 }}&gt;校验优先落库 —— 本作品最关键的设计选择&lt;/Text&gt;&#10;        &lt;/Box&gt;&#10;        &lt;Text style={{ fontSize: 14, fontFamily: 'Consolas', color: '#4FE0B0', opacity: 0.8 }}&gt;核心论点&lt;/Text&gt;&#10;    &lt;/Box&gt;&#10;    &lt;Box style={{ height: 500, flexDirection: 'row', gap: 28 }}&gt;&#10;        &lt;Box style={{ width: 700, flexDirection: 'column', gap: 12 }}&gt;&#10;            &lt;Text style={{ fontSize: 18, color: '#E8EEF7', opacity: 0.8, lineHeight: 1.5 }}&gt;五类字段全部走白名单：任何一项不合法，要么被过滤，要么回落到默认值。&lt;/Text&gt;&#10;            &lt;Table&#10;                style={{ width: 700, height: 392 }}&#10;                defaultTextStyle={{ fontSize: 15, textAlign: 'left', color: '#E8EEF7' }}&#10;                defaultCellStyle={{&#10;                    border: {&#10;                        left: { width: 1, color: 'rgba(232,238,247,0.12)' },&#10;                        right: { width: 1, color: 'rgba(232,238,247,0.12)' },&#10;                        top: { width: 1, color: 'rgba(232,238,247,0.12)' },&#10;                        bottom: { width: 1, color: 'rgba(232,238,247,0.12)' },&#10;                    },&#10;                }}&#10;                cells={[&#10;                    [&#10;                        { text: '字段', textStyle: { bold: true, color: '#0B1220' }, cellStyle: { background: { color: '#4FE0B0' } } },&#10;                        { text: '合法取值范围', textStyle: { bold: true, color: '#0B1220' }, cellStyle: { background: { color: '#4FE0B0' } } },&#10;                        { text: '非法时的处理', textStyle: { bold: true, color: '#0B1220' }, cellStyle: { background: { color: '#4FE0B0' } } },&#10;                    ],&#10;                    [&#10;                        { text: '类型', cellStyle: { background: { color: 'rgba(232,238,247,0.05)' } } },&#10;                        '单次 / 每天 / 每周 / 每月',&#10;                        { text: '回落为「单次」', textStyle: { color: '#4FE0B0' } },&#10;                    ],&#10;                    [&#10;                        '时间',&#10;                        '合法 HH:MM（时≤23、分≤59）',&#10;                        { text: '回落为 09:00', textStyle: { color: '#4FE0B0' } },&#10;                    ],&#10;                    [&#10;                        { text: '星期', cellStyle: { background: { color: 'rgba(232,238,247,0.05)' } } },&#10;                        '整数且限定 0–6',&#10;                        { text: '越界值被过滤', textStyle: { color: '#4FE0B0' } },&#10;                    ],&#10;                    [&#10;                        '日期',&#10;                        '整数且限定 1–31',&#10;                        { text: '越界值被过滤', textStyle: { color: '#4FE0B0' } },&#10;                    ],&#10;                    [&#10;                        { text: '系统操作', cellStyle: { background: { color: 'rgba(232,238,247,0.05)' } } },&#10;                        '锁屏 / 关机 / 重启 / 空',&#10;                        { text: '非法值置空', textStyle: { color: '#4FE0B0' } },&#10;                    ],&#10;                    [&#10;                        '标题',&#10;                        '非空',&#10;                        { text: '回落为用户原句', textStyle: { color: '#4FE0B0' } },&#10;                    ],&#10;                ]}&#10;            /&gt;&#10;        &lt;/Box&gt;&#10;        &lt;Box style={{ flex: 1, flexDirection: 'column', gap: 14 }}&gt;&#10;            &lt;Box style={{ height: 250, flexDirection: 'column', justifyContent: 'center', alignItems: 'center', gap: 6, background: 'rgba(232,238,247,0.03)', border: '1px solid rgba(232,238,247,0.10)', borderRadius: 12 }}&gt;&#10;                &lt;svg width={360} height={220} viewBox='0 0 360 220'&gt;&#10;                    &lt;rect x='70' y='4' width='220' height='40' rx='8' fill='rgba(232,238,247,0.07)' stroke='rgba(232,238,247,0.20)' /&gt;&#10;                    &lt;path d='M180 44 L180 64' fill='none' stroke='#4FE0B0' strokeWidth='2' /&gt;&#10;                    &lt;path d='M174 58 L180 66 L186 58 Z' fill='#4FE0B0' /&gt;&#10;                    &lt;rect x='70' y='68' width='220' height='40' rx='8' fill='rgba(79,224,176,0.14)' stroke='#4FE0B0' /&gt;&#10;                    &lt;path d='M180 108 L180 122 L96 122 L96 140' fill='none' stroke='#4FE0B0' strokeWidth='2' opacity='0.55' /&gt;&#10;                    &lt;path d='M180 108 L180 122 L264 122 L264 140' fill='none' stroke='#4FE0B0' strokeWidth='2' /&gt;&#10;                    &lt;path d='M258 134 L264 142 L270 134 Z' fill='#4FE0B0' /&gt;&#10;                    &lt;rect x='30' y='146' width='132' height='42' rx='8' fill='rgba(232,238,247,0.05)' stroke='rgba(232,238,247,0.18)' /&gt;&#10;                    &lt;path d='M88 158 L104 178 M104 158 L88 178' fill='none' stroke='#E8EEF7' strokeWidth='2' opacity='0.45' /&gt;&#10;                    &lt;rect x='198' y='146' width='132' height='42' rx='8' fill='rgba(79,224,176,0.10)' stroke='#4FE0B0' /&gt;&#10;                    &lt;circle cx='216' cy='167' r='5' fill='#4FE0B0' /&gt;&#10;                &lt;/svg&gt;&#10;                &lt;Box style={{ flexDirection: 'row', gap: 22 }}&gt;&#10;                    &lt;Text style={{ fontSize: 14, color: '#E8EEF7', opacity: 0.6 }}&gt;不合法 → 拦截&lt;/Text&gt;&#10;                    &lt;Text style={{ fontSize: 14, color: '#4FE0B0' }}&gt;合法 → 写入提醒数据&lt;/Text&gt;&#10;                &lt;/Box&gt;&#10;            &lt;/Box&gt;&#10;            &lt;Box style={{ padding: '16px 18px', background: 'rgba(79,224,176,0.12)', border: '1px solid #4FE0B0', borderRadius: 12 }}&gt;&#10;                &lt;Text style={{ fontSize: 16, color: '#E8EEF7', lineHeight: 1.55 }}&gt;模型负责&lt;span style={{ fontWeight: 'bold', color: '#4FE0B0' }}&gt;提出建议&lt;/span&gt;，系统负责&lt;span style={{ fontWeight: 'bold', color: '#4FE0B0' }}&gt;判断能否执行&lt;/span&gt;；结果以表单呈现，&lt;span style={{ fontWeight: 'bold', color: '#4FE0B0' }}&gt;用户确认后才写入&lt;/span&gt;——人始终在最终决策位。&lt;/Text&gt;&#10;            &lt;/Box&gt;&#10;            &lt;Box style={{ paddingTop: 12, borderTop: '1px solid rgba(232,238,247,0.12)' }}&gt;&#10;                &lt;Text style={{ fontSize: 14, color: '#E8EEF7', opacity: 0.6, lineHeight: 1.5 }}&gt;有测试作证据：构造「非法类型 + 非法时间 + 越界星期 + 越界日期」的脏数据，验证全部被正确拦截。&lt;/Text&gt;&#10;            &lt;/Box&gt;&#10;        &lt;/Box&gt;&#10;    &lt;/Box&gt;&#10;    &lt;Box style={{ height: 60, flexDirection: 'row', alignItems: 'center', justifyContent: 'space-between' }}&gt;&#10;        &lt;Text style={{ fontSize: 14, color: '#E8EEF7', opacity: 0.42 }}&gt;知歇 ZhiXie · V1.0.0&lt;/Text&gt;&#10;        &lt;Text style={{ fontSize: 14, fontFamily: 'Consolas', color: '#E8EEF7', opacity: 0.42 }}&gt;09 / 18&lt;/Text&gt;&#10;    &lt;/Box&gt;&#10;&lt;/Slide&gt;&#10;"/>
+        <p:cNvPr id="365" name=""/>
         <p:cNvGrpSpPr/>
         <p:nvPr/>
       </p:nvGrpSpPr>
@@ -17196,7 +17305,10 @@
         </p:spPr>
         <p:txBody>
           <a:bodyPr/>
-          <a:p/>
+          <a:p>
+            <a:pPr/>
+            <a:endParaRPr/>
+          </a:p>
         </p:txBody>
       </p:sp>
       <p:sp>
@@ -18198,7 +18310,10 @@
         </p:spPr>
         <p:txBody>
           <a:bodyPr/>
-          <a:p/>
+          <a:p>
+            <a:pPr/>
+            <a:endParaRPr/>
+          </a:p>
         </p:txBody>
       </p:sp>
       <p:pic>
@@ -18317,7 +18432,10 @@
         </p:spPr>
         <p:txBody>
           <a:bodyPr/>
-          <a:p/>
+          <a:p>
+            <a:pPr/>
+            <a:endParaRPr/>
+          </a:p>
         </p:txBody>
       </p:sp>
       <p:sp>
@@ -18456,7 +18574,10 @@
         </p:spPr>
         <p:txBody>
           <a:bodyPr/>
-          <a:p/>
+          <a:p>
+            <a:pPr/>
+            <a:endParaRPr/>
+          </a:p>
         </p:txBody>
       </p:sp>
       <p:sp>
